--- a/project_24_financial_fraud_gnn/presentations/project_presentation.pptx
+++ b/project_24_financial_fraud_gnn/presentations/project_presentation.pptx
@@ -13,6 +13,13 @@
     <p:sldId id="261" r:id="rId12"/>
     <p:sldId id="262" r:id="rId13"/>
     <p:sldId id="263" r:id="rId14"/>
+    <p:sldId id="264" r:id="rId15"/>
+    <p:sldId id="265" r:id="rId16"/>
+    <p:sldId id="266" r:id="rId17"/>
+    <p:sldId id="267" r:id="rId18"/>
+    <p:sldId id="268" r:id="rId19"/>
+    <p:sldId id="269" r:id="rId20"/>
+    <p:sldId id="270" r:id="rId21"/>
   </p:sldIdLst>
   <p:sldSz cx="12191695" cy="6858000" type="screen4x3"/>
   <p:notesSz cx="6858000" cy="9144000"/>
@@ -3110,7 +3117,7 @@
             <a:avLst/>
           </a:prstGeom>
           <a:solidFill>
-            <a:srgbClr val="0F172A"/>
+            <a:srgbClr val="04060D"/>
           </a:solidFill>
           <a:ln>
             <a:noFill/>
@@ -3140,14 +3147,195 @@
       </p:sp>
       <p:sp>
         <p:nvSpPr>
+          <p:cNvPr id="3" name="Rounded Rectangle 2"/>
+          <p:cNvSpPr/>
+          <p:nvPr/>
+        </p:nvSpPr>
+        <p:spPr>
+          <a:xfrm>
+            <a:off x="731520" y="1097280"/>
+            <a:ext cx="10728655" cy="5029200"/>
+          </a:xfrm>
+          <a:prstGeom prst="roundRect">
+            <a:avLst/>
+          </a:prstGeom>
+          <a:solidFill>
+            <a:srgbClr val="0E1424"/>
+          </a:solidFill>
+          <a:ln>
+            <a:solidFill>
+              <a:srgbClr val="A855F7"/>
+            </a:solidFill>
+          </a:ln>
+        </p:spPr>
+        <p:style>
+          <a:lnRef idx="1">
+            <a:schemeClr val="accent1"/>
+          </a:lnRef>
+          <a:fillRef idx="3">
+            <a:schemeClr val="accent1"/>
+          </a:fillRef>
+          <a:effectRef idx="2">
+            <a:schemeClr val="accent1"/>
+          </a:effectRef>
+          <a:fontRef idx="minor">
+            <a:schemeClr val="lt1"/>
+          </a:fontRef>
+        </p:style>
+        <p:txBody>
+          <a:bodyPr rtlCol="0" anchor="ctr" wrap="square"/>
+          <a:lstStyle/>
+          <a:p>
+            <a:pPr algn="ctr">
+              <a:defRPr sz="1200" b="1">
+                <a:solidFill>
+                  <a:srgbClr val="A855F7"/>
+                </a:solidFill>
+              </a:defRPr>
+            </a:pPr>
+            <a:r>
+              <a:t>COLLEGE CAPSTONE ENGINEERING PORTFOLIO • PROJECT-024</a:t>
+            </a:r>
+          </a:p>
+          <a:p>
+            <a:pPr>
+              <a:defRPr sz="2800" b="1">
+                <a:solidFill>
+                  <a:srgbClr val="F8FAFC"/>
+                </a:solidFill>
+              </a:defRPr>
+            </a:pPr>
+            <a:r>
+              <a:t>Financial Fraud Detection Using Graph Neural Networks (GNN)</a:t>
+            </a:r>
+          </a:p>
+          <a:p>
+            <a:pPr>
+              <a:defRPr sz="1500">
+                <a:solidFill>
+                  <a:srgbClr val="38BDF8"/>
+                </a:solidFill>
+              </a:defRPr>
+            </a:pPr>
+            <a:r>
+              <a:t>Autonomous Money Mule Interdiction, Circular Laundering Ring Hunter &amp; FinCEN SAR Compliance</a:t>
+            </a:r>
+          </a:p>
+          <a:p>
+            <a:br/>
+            <a:pPr>
+              <a:defRPr sz="1300">
+                <a:solidFill>
+                  <a:srgbClr val="94A3B8"/>
+                </a:solidFill>
+              </a:defRPr>
+            </a:pPr>
+            <a:r>
+              <a:t>• Core Architecture: 2-Layer Spectral Graph Convolutional Network (GCN) with Kipf-Welling Normalization</a:t>
+            </a:r>
+            <a:br/>
+            <a:r>
+              <a:t>• Topological Graph Database: SQLite ACID engine modeling 520 accounts and 1,650 transactions</a:t>
+            </a:r>
+            <a:br/>
+            <a:r>
+              <a:t>• Detection Capabilities: Circular carousel loops, smurfing dispersal trees, offshore funnel aggregation</a:t>
+            </a:r>
+            <a:br/>
+            <a:r>
+              <a:t>• Regulatory Compliance: Automated FinCEN Suspicious Activity Report (SAR) generation with cryptographic audit trail</a:t>
+            </a:r>
+            <a:br/>
+            <a:r>
+              <a:t>• Real-Time Interactive Canvas: Force-directed graph physics engine, node inspector, and freeze controls</a:t>
+            </a:r>
+          </a:p>
+          <a:p>
+            <a:br/>
+            <a:pPr>
+              <a:defRPr sz="1100">
+                <a:solidFill>
+                  <a:srgbClr val="A855F7"/>
+                </a:solidFill>
+              </a:defRPr>
+            </a:pPr>
+            <a:r>
+              <a:t>Production Port: http://127.0.0.1:5024  •  Model Status: Serialized PyTorch GCN (100% Test Accuracy)  •  Stack: PyTorch + Flask + SQLite</a:t>
+            </a:r>
+          </a:p>
+        </p:txBody>
+      </p:sp>
+    </p:spTree>
+  </p:cSld>
+  <p:clrMapOvr>
+    <a:masterClrMapping/>
+  </p:clrMapOvr>
+</p:sld>
+</file>
+
+<file path=ppt/slides/slide10.xml><?xml version="1.0" encoding="utf-8"?>
+<p:sld xmlns:a="http://schemas.openxmlformats.org/drawingml/2006/main" xmlns:p="http://schemas.openxmlformats.org/presentationml/2006/main" xmlns:r="http://schemas.openxmlformats.org/officeDocument/2006/relationships">
+  <p:cSld>
+    <p:spTree>
+      <p:nvGrpSpPr>
+        <p:cNvPr id="1" name=""/>
+        <p:cNvGrpSpPr/>
+        <p:nvPr/>
+      </p:nvGrpSpPr>
+      <p:grpSpPr/>
+      <p:sp>
+        <p:nvSpPr>
+          <p:cNvPr id="2" name="Rectangle 1"/>
+          <p:cNvSpPr/>
+          <p:nvPr/>
+        </p:nvSpPr>
+        <p:spPr>
+          <a:xfrm>
+            <a:off x="0" y="0"/>
+            <a:ext cx="12191695" cy="6858000"/>
+          </a:xfrm>
+          <a:prstGeom prst="rect">
+            <a:avLst/>
+          </a:prstGeom>
+          <a:solidFill>
+            <a:srgbClr val="04060D"/>
+          </a:solidFill>
+          <a:ln>
+            <a:noFill/>
+          </a:ln>
+        </p:spPr>
+        <p:style>
+          <a:lnRef idx="1">
+            <a:schemeClr val="accent1"/>
+          </a:lnRef>
+          <a:fillRef idx="3">
+            <a:schemeClr val="accent1"/>
+          </a:fillRef>
+          <a:effectRef idx="2">
+            <a:schemeClr val="accent1"/>
+          </a:effectRef>
+          <a:fontRef idx="minor">
+            <a:schemeClr val="lt1"/>
+          </a:fontRef>
+        </p:style>
+        <p:txBody>
+          <a:bodyPr rtlCol="0" anchor="ctr"/>
+          <a:lstStyle/>
+          <a:p>
+            <a:pPr algn="ctr"/>
+          </a:p>
+        </p:txBody>
+      </p:sp>
+      <p:sp>
+        <p:nvSpPr>
           <p:cNvPr id="3" name="TextBox 2"/>
           <p:cNvSpPr txBox="1"/>
           <p:nvPr/>
         </p:nvSpPr>
         <p:spPr>
           <a:xfrm>
-            <a:off x="1097280" y="1645920"/>
-            <a:ext cx="10058400" cy="3474720"/>
+            <a:off x="731520" y="365760"/>
+            <a:ext cx="10728655" cy="1005840"/>
           </a:xfrm>
           <a:prstGeom prst="rect">
             <a:avLst/>
@@ -3161,44 +3349,1361 @@
           <a:lstStyle/>
           <a:p>
             <a:pPr>
-              <a:defRPr sz="1400" b="1">
+              <a:defRPr sz="1100" b="1">
+                <a:solidFill>
+                  <a:srgbClr val="A855F7"/>
+                </a:solidFill>
+              </a:defRPr>
+            </a:pPr>
+            <a:r>
+              <a:t>GRAPH MACHINE LEARNING &amp; FINTECH AML • PROJECT-024</a:t>
+            </a:r>
+          </a:p>
+          <a:p>
+            <a:pPr>
+              <a:defRPr sz="2200" b="1">
+                <a:solidFill>
+                  <a:srgbClr val="F8FAFC"/>
+                </a:solidFill>
+              </a:defRPr>
+            </a:pPr>
+            <a:r>
+              <a:t>GNN Latent Vector Embeddings: Layer-1 Topological Representations</a:t>
+            </a:r>
+          </a:p>
+        </p:txBody>
+      </p:sp>
+      <p:pic>
+        <p:nvPicPr>
+          <p:cNvPr id="4" name="Picture 3" descr="05_gnn_node_embeddings_matrix.png"/>
+          <p:cNvPicPr>
+            <a:picLocks noChangeAspect="1"/>
+          </p:cNvPicPr>
+          <p:nvPr/>
+        </p:nvPicPr>
+        <p:blipFill>
+          <a:blip r:embed="rId2"/>
+          <a:stretch>
+            <a:fillRect/>
+          </a:stretch>
+        </p:blipFill>
+        <p:spPr>
+          <a:xfrm>
+            <a:off x="731520" y="1645920"/>
+            <a:ext cx="7132320" cy="4480560"/>
+          </a:xfrm>
+          <a:prstGeom prst="rect">
+            <a:avLst/>
+          </a:prstGeom>
+        </p:spPr>
+      </p:pic>
+      <p:sp>
+        <p:nvSpPr>
+          <p:cNvPr id="5" name="Rounded Rectangle 4"/>
+          <p:cNvSpPr/>
+          <p:nvPr/>
+        </p:nvSpPr>
+        <p:spPr>
+          <a:xfrm>
+            <a:off x="8046720" y="1645920"/>
+            <a:ext cx="3413455" cy="4480560"/>
+          </a:xfrm>
+          <a:prstGeom prst="roundRect">
+            <a:avLst/>
+          </a:prstGeom>
+          <a:solidFill>
+            <a:srgbClr val="0E1424"/>
+          </a:solidFill>
+          <a:ln>
+            <a:solidFill>
+              <a:srgbClr val="A855F7"/>
+            </a:solidFill>
+          </a:ln>
+        </p:spPr>
+        <p:style>
+          <a:lnRef idx="1">
+            <a:schemeClr val="accent1"/>
+          </a:lnRef>
+          <a:fillRef idx="3">
+            <a:schemeClr val="accent1"/>
+          </a:fillRef>
+          <a:effectRef idx="2">
+            <a:schemeClr val="accent1"/>
+          </a:effectRef>
+          <a:fontRef idx="minor">
+            <a:schemeClr val="lt1"/>
+          </a:fontRef>
+        </p:style>
+        <p:txBody>
+          <a:bodyPr rtlCol="0" anchor="ctr" wrap="square"/>
+          <a:lstStyle/>
+          <a:p>
+            <a:pPr algn="ctr">
+              <a:defRPr sz="1500" b="1">
                 <a:solidFill>
                   <a:srgbClr val="38BDF8"/>
                 </a:solidFill>
               </a:defRPr>
             </a:pPr>
             <a:r>
-              <a:t>PROJECT 24 OF 55  •  RESEARCH &amp; IMPLEMENTATION DECK</a:t>
-            </a:r>
-          </a:p>
-          <a:p>
+              <a:t>Forensic Capability Analysis</a:t>
+            </a:r>
+          </a:p>
+          <a:p>
+            <a:br/>
             <a:pPr>
-              <a:spcBef>
-                <a:spcPts val="1400"/>
-              </a:spcBef>
-              <a:defRPr sz="3200" b="1">
-                <a:solidFill>
-                  <a:srgbClr val="FFFFFF"/>
+              <a:defRPr sz="1100">
+                <a:solidFill>
+                  <a:srgbClr val="94A3B8"/>
                 </a:solidFill>
               </a:defRPr>
             </a:pPr>
             <a:r>
-              <a:t>Early Detection of Financial Fraudulent Transactions Using Graph Neural Networks</a:t>
-            </a:r>
-          </a:p>
+              <a:t>• Latent Vector Inspection:</a:t>
+            </a:r>
+            <a:br/>
+            <a:r>
+              <a:t>Inspects the 16-dimensional continuous latent space H^(1) generated by the first GraphConvolutionLayer.</a:t>
+            </a:r>
+            <a:br/>
+            <a:br/>
+            <a:r>
+              <a:t>• Manifold Separation:</a:t>
+            </a:r>
+            <a:br/>
+            <a:r>
+              <a:t>Illicit money mules and shell accounts map to distinct mathematical clusters compared to legitimate retail accounts.</a:t>
+            </a:r>
+            <a:br/>
+            <a:br/>
+            <a:r>
+              <a:t>• Direct Tabular Audit:</a:t>
+            </a:r>
+            <a:br/>
+            <a:r>
+              <a:t>Displays real-time risk percentages alongside exact 8-dimensional truncated embedding arrays.</a:t>
+            </a:r>
+          </a:p>
+        </p:txBody>
+      </p:sp>
+    </p:spTree>
+  </p:cSld>
+  <p:clrMapOvr>
+    <a:masterClrMapping/>
+  </p:clrMapOvr>
+</p:sld>
+</file>
+
+<file path=ppt/slides/slide11.xml><?xml version="1.0" encoding="utf-8"?>
+<p:sld xmlns:a="http://schemas.openxmlformats.org/drawingml/2006/main" xmlns:p="http://schemas.openxmlformats.org/presentationml/2006/main" xmlns:r="http://schemas.openxmlformats.org/officeDocument/2006/relationships">
+  <p:cSld>
+    <p:spTree>
+      <p:nvGrpSpPr>
+        <p:cNvPr id="1" name=""/>
+        <p:cNvGrpSpPr/>
+        <p:nvPr/>
+      </p:nvGrpSpPr>
+      <p:grpSpPr/>
+      <p:sp>
+        <p:nvSpPr>
+          <p:cNvPr id="2" name="Rectangle 1"/>
+          <p:cNvSpPr/>
+          <p:nvPr/>
+        </p:nvSpPr>
+        <p:spPr>
+          <a:xfrm>
+            <a:off x="0" y="0"/>
+            <a:ext cx="12191695" cy="6858000"/>
+          </a:xfrm>
+          <a:prstGeom prst="rect">
+            <a:avLst/>
+          </a:prstGeom>
+          <a:solidFill>
+            <a:srgbClr val="04060D"/>
+          </a:solidFill>
+          <a:ln>
+            <a:noFill/>
+          </a:ln>
+        </p:spPr>
+        <p:style>
+          <a:lnRef idx="1">
+            <a:schemeClr val="accent1"/>
+          </a:lnRef>
+          <a:fillRef idx="3">
+            <a:schemeClr val="accent1"/>
+          </a:fillRef>
+          <a:effectRef idx="2">
+            <a:schemeClr val="accent1"/>
+          </a:effectRef>
+          <a:fontRef idx="minor">
+            <a:schemeClr val="lt1"/>
+          </a:fontRef>
+        </p:style>
+        <p:txBody>
+          <a:bodyPr rtlCol="0" anchor="ctr"/>
+          <a:lstStyle/>
+          <a:p>
+            <a:pPr algn="ctr"/>
+          </a:p>
+        </p:txBody>
+      </p:sp>
+      <p:sp>
+        <p:nvSpPr>
+          <p:cNvPr id="3" name="TextBox 2"/>
+          <p:cNvSpPr txBox="1"/>
+          <p:nvPr/>
+        </p:nvSpPr>
+        <p:spPr>
+          <a:xfrm>
+            <a:off x="731520" y="365760"/>
+            <a:ext cx="10728655" cy="1005840"/>
+          </a:xfrm>
+          <a:prstGeom prst="rect">
+            <a:avLst/>
+          </a:prstGeom>
+          <a:noFill/>
+        </p:spPr>
+        <p:txBody>
+          <a:bodyPr wrap="square">
+            <a:spAutoFit/>
+          </a:bodyPr>
+          <a:lstStyle/>
           <a:p>
             <a:pPr>
-              <a:spcBef>
-                <a:spcPts val="1200"/>
-              </a:spcBef>
-              <a:defRPr sz="1600">
-                <a:solidFill>
-                  <a:srgbClr val="CBD5E1"/>
+              <a:defRPr sz="1100" b="1">
+                <a:solidFill>
+                  <a:srgbClr val="A855F7"/>
                 </a:solidFill>
               </a:defRPr>
             </a:pPr>
             <a:r>
-              <a:t>Enterprise-Grade AI Architecture, Machine Learning Pipeline &amp; Deployment Framework</a:t>
+              <a:t>GRAPH MACHINE LEARNING &amp; FINTECH AML • PROJECT-024</a:t>
+            </a:r>
+          </a:p>
+          <a:p>
+            <a:pPr>
+              <a:defRPr sz="2200" b="1">
+                <a:solidFill>
+                  <a:srgbClr val="F8FAFC"/>
+                </a:solidFill>
+              </a:defRPr>
+            </a:pPr>
+            <a:r>
+              <a:t>Regulatory FinCEN Compliance: Automated SAR Generation</a:t>
+            </a:r>
+          </a:p>
+        </p:txBody>
+      </p:sp>
+      <p:pic>
+        <p:nvPicPr>
+          <p:cNvPr id="4" name="Picture 3" descr="06_fincen_sar_regulatory_table.png"/>
+          <p:cNvPicPr>
+            <a:picLocks noChangeAspect="1"/>
+          </p:cNvPicPr>
+          <p:nvPr/>
+        </p:nvPicPr>
+        <p:blipFill>
+          <a:blip r:embed="rId2"/>
+          <a:stretch>
+            <a:fillRect/>
+          </a:stretch>
+        </p:blipFill>
+        <p:spPr>
+          <a:xfrm>
+            <a:off x="731520" y="1645920"/>
+            <a:ext cx="7132320" cy="4480560"/>
+          </a:xfrm>
+          <a:prstGeom prst="rect">
+            <a:avLst/>
+          </a:prstGeom>
+        </p:spPr>
+      </p:pic>
+      <p:sp>
+        <p:nvSpPr>
+          <p:cNvPr id="5" name="Rounded Rectangle 4"/>
+          <p:cNvSpPr/>
+          <p:nvPr/>
+        </p:nvSpPr>
+        <p:spPr>
+          <a:xfrm>
+            <a:off x="8046720" y="1645920"/>
+            <a:ext cx="3413455" cy="4480560"/>
+          </a:xfrm>
+          <a:prstGeom prst="roundRect">
+            <a:avLst/>
+          </a:prstGeom>
+          <a:solidFill>
+            <a:srgbClr val="0E1424"/>
+          </a:solidFill>
+          <a:ln>
+            <a:solidFill>
+              <a:srgbClr val="A855F7"/>
+            </a:solidFill>
+          </a:ln>
+        </p:spPr>
+        <p:style>
+          <a:lnRef idx="1">
+            <a:schemeClr val="accent1"/>
+          </a:lnRef>
+          <a:fillRef idx="3">
+            <a:schemeClr val="accent1"/>
+          </a:fillRef>
+          <a:effectRef idx="2">
+            <a:schemeClr val="accent1"/>
+          </a:effectRef>
+          <a:fontRef idx="minor">
+            <a:schemeClr val="lt1"/>
+          </a:fontRef>
+        </p:style>
+        <p:txBody>
+          <a:bodyPr rtlCol="0" anchor="ctr" wrap="square"/>
+          <a:lstStyle/>
+          <a:p>
+            <a:pPr algn="ctr">
+              <a:defRPr sz="1500" b="1">
+                <a:solidFill>
+                  <a:srgbClr val="38BDF8"/>
+                </a:solidFill>
+              </a:defRPr>
+            </a:pPr>
+            <a:r>
+              <a:t>Forensic Capability Analysis</a:t>
+            </a:r>
+          </a:p>
+          <a:p>
+            <a:br/>
+            <a:pPr>
+              <a:defRPr sz="1100">
+                <a:solidFill>
+                  <a:srgbClr val="94A3B8"/>
+                </a:solidFill>
+              </a:defRPr>
+            </a:pPr>
+            <a:r>
+              <a:t>• Standardized FinCEN Table:</a:t>
+            </a:r>
+            <a:br/>
+            <a:r>
+              <a:t>Lists all high-risk accounts exceeding regulatory thresholds with entity classification and risk ratings.</a:t>
+            </a:r>
+            <a:br/>
+            <a:br/>
+            <a:r>
+              <a:t>• One-Click Interdiction:</a:t>
+            </a:r>
+            <a:br/>
+            <a:r>
+              <a:t>Compliance officers can directly freeze accounts from the table, triggering real-time GCN risk recalculation.</a:t>
+            </a:r>
+            <a:br/>
+            <a:br/>
+            <a:r>
+              <a:t>• Export Regulatory Dossier:</a:t>
+            </a:r>
+            <a:br/>
+            <a:r>
+              <a:t>Downloads JSON compliance report with filing IDs, audit logs, and suspect entity lists for regulatory submission.</a:t>
+            </a:r>
+          </a:p>
+        </p:txBody>
+      </p:sp>
+    </p:spTree>
+  </p:cSld>
+  <p:clrMapOvr>
+    <a:masterClrMapping/>
+  </p:clrMapOvr>
+</p:sld>
+</file>
+
+<file path=ppt/slides/slide12.xml><?xml version="1.0" encoding="utf-8"?>
+<p:sld xmlns:a="http://schemas.openxmlformats.org/drawingml/2006/main" xmlns:p="http://schemas.openxmlformats.org/presentationml/2006/main" xmlns:r="http://schemas.openxmlformats.org/officeDocument/2006/relationships">
+  <p:cSld>
+    <p:spTree>
+      <p:nvGrpSpPr>
+        <p:cNvPr id="1" name=""/>
+        <p:cNvGrpSpPr/>
+        <p:nvPr/>
+      </p:nvGrpSpPr>
+      <p:grpSpPr/>
+      <p:sp>
+        <p:nvSpPr>
+          <p:cNvPr id="2" name="Rectangle 1"/>
+          <p:cNvSpPr/>
+          <p:nvPr/>
+        </p:nvSpPr>
+        <p:spPr>
+          <a:xfrm>
+            <a:off x="0" y="0"/>
+            <a:ext cx="12191695" cy="6858000"/>
+          </a:xfrm>
+          <a:prstGeom prst="rect">
+            <a:avLst/>
+          </a:prstGeom>
+          <a:solidFill>
+            <a:srgbClr val="04060D"/>
+          </a:solidFill>
+          <a:ln>
+            <a:noFill/>
+          </a:ln>
+        </p:spPr>
+        <p:style>
+          <a:lnRef idx="1">
+            <a:schemeClr val="accent1"/>
+          </a:lnRef>
+          <a:fillRef idx="3">
+            <a:schemeClr val="accent1"/>
+          </a:fillRef>
+          <a:effectRef idx="2">
+            <a:schemeClr val="accent1"/>
+          </a:effectRef>
+          <a:fontRef idx="minor">
+            <a:schemeClr val="lt1"/>
+          </a:fontRef>
+        </p:style>
+        <p:txBody>
+          <a:bodyPr rtlCol="0" anchor="ctr"/>
+          <a:lstStyle/>
+          <a:p>
+            <a:pPr algn="ctr"/>
+          </a:p>
+        </p:txBody>
+      </p:sp>
+      <p:sp>
+        <p:nvSpPr>
+          <p:cNvPr id="3" name="TextBox 2"/>
+          <p:cNvSpPr txBox="1"/>
+          <p:nvPr/>
+        </p:nvSpPr>
+        <p:spPr>
+          <a:xfrm>
+            <a:off x="731520" y="365760"/>
+            <a:ext cx="10728655" cy="1005840"/>
+          </a:xfrm>
+          <a:prstGeom prst="rect">
+            <a:avLst/>
+          </a:prstGeom>
+          <a:noFill/>
+        </p:spPr>
+        <p:txBody>
+          <a:bodyPr wrap="square">
+            <a:spAutoFit/>
+          </a:bodyPr>
+          <a:lstStyle/>
+          <a:p>
+            <a:pPr>
+              <a:defRPr sz="1100" b="1">
+                <a:solidFill>
+                  <a:srgbClr val="A855F7"/>
+                </a:solidFill>
+              </a:defRPr>
+            </a:pPr>
+            <a:r>
+              <a:t>GRAPH MACHINE LEARNING &amp; FINTECH AML • PROJECT-024</a:t>
+            </a:r>
+          </a:p>
+          <a:p>
+            <a:pPr>
+              <a:defRPr sz="2200" b="1">
+                <a:solidFill>
+                  <a:srgbClr val="F8FAFC"/>
+                </a:solidFill>
+              </a:defRPr>
+            </a:pPr>
+            <a:r>
+              <a:t>Autonomous Sanctions Protocol: Asset Freezing &amp; Risk Diffusion</a:t>
+            </a:r>
+          </a:p>
+        </p:txBody>
+      </p:sp>
+      <p:pic>
+        <p:nvPicPr>
+          <p:cNvPr id="4" name="Picture 3" descr="07_account_freeze_sanction_modal.png"/>
+          <p:cNvPicPr>
+            <a:picLocks noChangeAspect="1"/>
+          </p:cNvPicPr>
+          <p:nvPr/>
+        </p:nvPicPr>
+        <p:blipFill>
+          <a:blip r:embed="rId2"/>
+          <a:stretch>
+            <a:fillRect/>
+          </a:stretch>
+        </p:blipFill>
+        <p:spPr>
+          <a:xfrm>
+            <a:off x="731520" y="1645920"/>
+            <a:ext cx="7132320" cy="4480560"/>
+          </a:xfrm>
+          <a:prstGeom prst="rect">
+            <a:avLst/>
+          </a:prstGeom>
+        </p:spPr>
+      </p:pic>
+      <p:sp>
+        <p:nvSpPr>
+          <p:cNvPr id="5" name="Rounded Rectangle 4"/>
+          <p:cNvSpPr/>
+          <p:nvPr/>
+        </p:nvSpPr>
+        <p:spPr>
+          <a:xfrm>
+            <a:off x="8046720" y="1645920"/>
+            <a:ext cx="3413455" cy="4480560"/>
+          </a:xfrm>
+          <a:prstGeom prst="roundRect">
+            <a:avLst/>
+          </a:prstGeom>
+          <a:solidFill>
+            <a:srgbClr val="0E1424"/>
+          </a:solidFill>
+          <a:ln>
+            <a:solidFill>
+              <a:srgbClr val="A855F7"/>
+            </a:solidFill>
+          </a:ln>
+        </p:spPr>
+        <p:style>
+          <a:lnRef idx="1">
+            <a:schemeClr val="accent1"/>
+          </a:lnRef>
+          <a:fillRef idx="3">
+            <a:schemeClr val="accent1"/>
+          </a:fillRef>
+          <a:effectRef idx="2">
+            <a:schemeClr val="accent1"/>
+          </a:effectRef>
+          <a:fontRef idx="minor">
+            <a:schemeClr val="lt1"/>
+          </a:fontRef>
+        </p:style>
+        <p:txBody>
+          <a:bodyPr rtlCol="0" anchor="ctr" wrap="square"/>
+          <a:lstStyle/>
+          <a:p>
+            <a:pPr algn="ctr">
+              <a:defRPr sz="1500" b="1">
+                <a:solidFill>
+                  <a:srgbClr val="38BDF8"/>
+                </a:solidFill>
+              </a:defRPr>
+            </a:pPr>
+            <a:r>
+              <a:t>Forensic Capability Analysis</a:t>
+            </a:r>
+          </a:p>
+          <a:p>
+            <a:br/>
+            <a:pPr>
+              <a:defRPr sz="1100">
+                <a:solidFill>
+                  <a:srgbClr val="94A3B8"/>
+                </a:solidFill>
+              </a:defRPr>
+            </a:pPr>
+            <a:r>
+              <a:t>• Instant Sanction Propagation:</a:t>
+            </a:r>
+            <a:br/>
+            <a:r>
+              <a:t>Freezing an account sets risk to 0.999 and immediately broadcasts counterparty risk to all connected neighbors.</a:t>
+            </a:r>
+            <a:br/>
+            <a:br/>
+            <a:r>
+              <a:t>• ACID State Synchronization:</a:t>
+            </a:r>
+            <a:br/>
+            <a:r>
+              <a:t>Persists sanctions in SQLite 'frozen_sanctions' table with cryptographic timestamps and actor attribution.</a:t>
+            </a:r>
+            <a:br/>
+            <a:br/>
+            <a:r>
+              <a:t>• Dynamic Visual Indicators:</a:t>
+            </a:r>
+            <a:br/>
+            <a:r>
+              <a:t>Node glowing aura changes to purple-frozen badge, ensuring immediate situational awareness.</a:t>
+            </a:r>
+          </a:p>
+        </p:txBody>
+      </p:sp>
+    </p:spTree>
+  </p:cSld>
+  <p:clrMapOvr>
+    <a:masterClrMapping/>
+  </p:clrMapOvr>
+</p:sld>
+</file>
+
+<file path=ppt/slides/slide13.xml><?xml version="1.0" encoding="utf-8"?>
+<p:sld xmlns:a="http://schemas.openxmlformats.org/drawingml/2006/main" xmlns:p="http://schemas.openxmlformats.org/presentationml/2006/main" xmlns:r="http://schemas.openxmlformats.org/officeDocument/2006/relationships">
+  <p:cSld>
+    <p:spTree>
+      <p:nvGrpSpPr>
+        <p:cNvPr id="1" name=""/>
+        <p:cNvGrpSpPr/>
+        <p:nvPr/>
+      </p:nvGrpSpPr>
+      <p:grpSpPr/>
+      <p:sp>
+        <p:nvSpPr>
+          <p:cNvPr id="2" name="Rectangle 1"/>
+          <p:cNvSpPr/>
+          <p:nvPr/>
+        </p:nvSpPr>
+        <p:spPr>
+          <a:xfrm>
+            <a:off x="0" y="0"/>
+            <a:ext cx="12191695" cy="6858000"/>
+          </a:xfrm>
+          <a:prstGeom prst="rect">
+            <a:avLst/>
+          </a:prstGeom>
+          <a:solidFill>
+            <a:srgbClr val="04060D"/>
+          </a:solidFill>
+          <a:ln>
+            <a:noFill/>
+          </a:ln>
+        </p:spPr>
+        <p:style>
+          <a:lnRef idx="1">
+            <a:schemeClr val="accent1"/>
+          </a:lnRef>
+          <a:fillRef idx="3">
+            <a:schemeClr val="accent1"/>
+          </a:fillRef>
+          <a:effectRef idx="2">
+            <a:schemeClr val="accent1"/>
+          </a:effectRef>
+          <a:fontRef idx="minor">
+            <a:schemeClr val="lt1"/>
+          </a:fontRef>
+        </p:style>
+        <p:txBody>
+          <a:bodyPr rtlCol="0" anchor="ctr"/>
+          <a:lstStyle/>
+          <a:p>
+            <a:pPr algn="ctr"/>
+          </a:p>
+        </p:txBody>
+      </p:sp>
+      <p:sp>
+        <p:nvSpPr>
+          <p:cNvPr id="3" name="TextBox 2"/>
+          <p:cNvSpPr txBox="1"/>
+          <p:nvPr/>
+        </p:nvSpPr>
+        <p:spPr>
+          <a:xfrm>
+            <a:off x="731520" y="365760"/>
+            <a:ext cx="10728655" cy="1005840"/>
+          </a:xfrm>
+          <a:prstGeom prst="rect">
+            <a:avLst/>
+          </a:prstGeom>
+          <a:noFill/>
+        </p:spPr>
+        <p:txBody>
+          <a:bodyPr wrap="square">
+            <a:spAutoFit/>
+          </a:bodyPr>
+          <a:lstStyle/>
+          <a:p>
+            <a:pPr>
+              <a:defRPr sz="1100" b="1">
+                <a:solidFill>
+                  <a:srgbClr val="A855F7"/>
+                </a:solidFill>
+              </a:defRPr>
+            </a:pPr>
+            <a:r>
+              <a:t>GRAPH MACHINE LEARNING &amp; FINTECH AML • PROJECT-024</a:t>
+            </a:r>
+          </a:p>
+          <a:p>
+            <a:pPr>
+              <a:defRPr sz="2200" b="1">
+                <a:solidFill>
+                  <a:srgbClr val="F8FAFC"/>
+                </a:solidFill>
+              </a:defRPr>
+            </a:pPr>
+            <a:r>
+              <a:t>Dynamic Laundering Injection: Zero-Downtime Graph Stress Testing</a:t>
+            </a:r>
+          </a:p>
+        </p:txBody>
+      </p:sp>
+      <p:pic>
+        <p:nvPicPr>
+          <p:cNvPr id="4" name="Picture 3" descr="08_dynamic_laundering_injection.png"/>
+          <p:cNvPicPr>
+            <a:picLocks noChangeAspect="1"/>
+          </p:cNvPicPr>
+          <p:nvPr/>
+        </p:nvPicPr>
+        <p:blipFill>
+          <a:blip r:embed="rId2"/>
+          <a:stretch>
+            <a:fillRect/>
+          </a:stretch>
+        </p:blipFill>
+        <p:spPr>
+          <a:xfrm>
+            <a:off x="731520" y="1645920"/>
+            <a:ext cx="7132320" cy="4480560"/>
+          </a:xfrm>
+          <a:prstGeom prst="rect">
+            <a:avLst/>
+          </a:prstGeom>
+        </p:spPr>
+      </p:pic>
+      <p:sp>
+        <p:nvSpPr>
+          <p:cNvPr id="5" name="Rounded Rectangle 4"/>
+          <p:cNvSpPr/>
+          <p:nvPr/>
+        </p:nvSpPr>
+        <p:spPr>
+          <a:xfrm>
+            <a:off x="8046720" y="1645920"/>
+            <a:ext cx="3413455" cy="4480560"/>
+          </a:xfrm>
+          <a:prstGeom prst="roundRect">
+            <a:avLst/>
+          </a:prstGeom>
+          <a:solidFill>
+            <a:srgbClr val="0E1424"/>
+          </a:solidFill>
+          <a:ln>
+            <a:solidFill>
+              <a:srgbClr val="A855F7"/>
+            </a:solidFill>
+          </a:ln>
+        </p:spPr>
+        <p:style>
+          <a:lnRef idx="1">
+            <a:schemeClr val="accent1"/>
+          </a:lnRef>
+          <a:fillRef idx="3">
+            <a:schemeClr val="accent1"/>
+          </a:fillRef>
+          <a:effectRef idx="2">
+            <a:schemeClr val="accent1"/>
+          </a:effectRef>
+          <a:fontRef idx="minor">
+            <a:schemeClr val="lt1"/>
+          </a:fontRef>
+        </p:style>
+        <p:txBody>
+          <a:bodyPr rtlCol="0" anchor="ctr" wrap="square"/>
+          <a:lstStyle/>
+          <a:p>
+            <a:pPr algn="ctr">
+              <a:defRPr sz="1500" b="1">
+                <a:solidFill>
+                  <a:srgbClr val="38BDF8"/>
+                </a:solidFill>
+              </a:defRPr>
+            </a:pPr>
+            <a:r>
+              <a:t>Forensic Capability Analysis</a:t>
+            </a:r>
+          </a:p>
+          <a:p>
+            <a:br/>
+            <a:pPr>
+              <a:defRPr sz="1100">
+                <a:solidFill>
+                  <a:srgbClr val="94A3B8"/>
+                </a:solidFill>
+              </a:defRPr>
+            </a:pPr>
+            <a:r>
+              <a:t>• Live Synthetic Injection:</a:t>
+            </a:r>
+            <a:br/>
+            <a:r>
+              <a:t>Injects multi-hop laundering rings (A -&gt; B -&gt; C -&gt; A) dynamically into the live running database.</a:t>
+            </a:r>
+            <a:br/>
+            <a:br/>
+            <a:r>
+              <a:t>• Instant Forward Pass Inference:</a:t>
+            </a:r>
+            <a:br/>
+            <a:r>
+              <a:t>GCN automatically extracts new features, recalculates normalized adjacency, and classifies injected nodes at 100% risk.</a:t>
+            </a:r>
+            <a:br/>
+            <a:br/>
+            <a:r>
+              <a:t>• Zero System Downtime:</a:t>
+            </a:r>
+            <a:br/>
+            <a:r>
+              <a:t>Demonstrates robustness of graph inference pipeline without requiring server restarts or database locks.</a:t>
+            </a:r>
+          </a:p>
+        </p:txBody>
+      </p:sp>
+    </p:spTree>
+  </p:cSld>
+  <p:clrMapOvr>
+    <a:masterClrMapping/>
+  </p:clrMapOvr>
+</p:sld>
+</file>
+
+<file path=ppt/slides/slide14.xml><?xml version="1.0" encoding="utf-8"?>
+<p:sld xmlns:a="http://schemas.openxmlformats.org/drawingml/2006/main" xmlns:p="http://schemas.openxmlformats.org/presentationml/2006/main" xmlns:r="http://schemas.openxmlformats.org/officeDocument/2006/relationships">
+  <p:cSld>
+    <p:spTree>
+      <p:nvGrpSpPr>
+        <p:cNvPr id="1" name=""/>
+        <p:cNvGrpSpPr/>
+        <p:nvPr/>
+      </p:nvGrpSpPr>
+      <p:grpSpPr/>
+      <p:sp>
+        <p:nvSpPr>
+          <p:cNvPr id="2" name="Rectangle 1"/>
+          <p:cNvSpPr/>
+          <p:nvPr/>
+        </p:nvSpPr>
+        <p:spPr>
+          <a:xfrm>
+            <a:off x="0" y="0"/>
+            <a:ext cx="12191695" cy="6858000"/>
+          </a:xfrm>
+          <a:prstGeom prst="rect">
+            <a:avLst/>
+          </a:prstGeom>
+          <a:solidFill>
+            <a:srgbClr val="04060D"/>
+          </a:solidFill>
+          <a:ln>
+            <a:noFill/>
+          </a:ln>
+        </p:spPr>
+        <p:style>
+          <a:lnRef idx="1">
+            <a:schemeClr val="accent1"/>
+          </a:lnRef>
+          <a:fillRef idx="3">
+            <a:schemeClr val="accent1"/>
+          </a:fillRef>
+          <a:effectRef idx="2">
+            <a:schemeClr val="accent1"/>
+          </a:effectRef>
+          <a:fontRef idx="minor">
+            <a:schemeClr val="lt1"/>
+          </a:fontRef>
+        </p:style>
+        <p:txBody>
+          <a:bodyPr rtlCol="0" anchor="ctr"/>
+          <a:lstStyle/>
+          <a:p>
+            <a:pPr algn="ctr"/>
+          </a:p>
+        </p:txBody>
+      </p:sp>
+      <p:sp>
+        <p:nvSpPr>
+          <p:cNvPr id="3" name="TextBox 2"/>
+          <p:cNvSpPr txBox="1"/>
+          <p:nvPr/>
+        </p:nvSpPr>
+        <p:spPr>
+          <a:xfrm>
+            <a:off x="731520" y="365760"/>
+            <a:ext cx="10728655" cy="1005840"/>
+          </a:xfrm>
+          <a:prstGeom prst="rect">
+            <a:avLst/>
+          </a:prstGeom>
+          <a:noFill/>
+        </p:spPr>
+        <p:txBody>
+          <a:bodyPr wrap="square">
+            <a:spAutoFit/>
+          </a:bodyPr>
+          <a:lstStyle/>
+          <a:p>
+            <a:pPr>
+              <a:defRPr sz="1100" b="1">
+                <a:solidFill>
+                  <a:srgbClr val="A855F7"/>
+                </a:solidFill>
+              </a:defRPr>
+            </a:pPr>
+            <a:r>
+              <a:t>GRAPH MACHINE LEARNING &amp; FINTECH AML • PROJECT-024</a:t>
+            </a:r>
+          </a:p>
+          <a:p>
+            <a:pPr>
+              <a:defRPr sz="2200" b="1">
+                <a:solidFill>
+                  <a:srgbClr val="F8FAFC"/>
+                </a:solidFill>
+              </a:defRPr>
+            </a:pPr>
+            <a:r>
+              <a:t>Empirical Evaluation, Benchmarks &amp; Ablation Analysis</a:t>
+            </a:r>
+          </a:p>
+        </p:txBody>
+      </p:sp>
+      <p:sp>
+        <p:nvSpPr>
+          <p:cNvPr id="4" name="Rounded Rectangle 3"/>
+          <p:cNvSpPr/>
+          <p:nvPr/>
+        </p:nvSpPr>
+        <p:spPr>
+          <a:xfrm>
+            <a:off x="731520" y="1645920"/>
+            <a:ext cx="5175504" cy="4480560"/>
+          </a:xfrm>
+          <a:prstGeom prst="roundRect">
+            <a:avLst/>
+          </a:prstGeom>
+          <a:solidFill>
+            <a:srgbClr val="0E1424"/>
+          </a:solidFill>
+          <a:ln>
+            <a:solidFill>
+              <a:srgbClr val="10B981"/>
+            </a:solidFill>
+          </a:ln>
+        </p:spPr>
+        <p:style>
+          <a:lnRef idx="1">
+            <a:schemeClr val="accent1"/>
+          </a:lnRef>
+          <a:fillRef idx="3">
+            <a:schemeClr val="accent1"/>
+          </a:fillRef>
+          <a:effectRef idx="2">
+            <a:schemeClr val="accent1"/>
+          </a:effectRef>
+          <a:fontRef idx="minor">
+            <a:schemeClr val="lt1"/>
+          </a:fontRef>
+        </p:style>
+        <p:txBody>
+          <a:bodyPr rtlCol="0" anchor="ctr" wrap="square"/>
+          <a:lstStyle/>
+          <a:p>
+            <a:pPr algn="ctr">
+              <a:defRPr sz="1600" b="1">
+                <a:solidFill>
+                  <a:srgbClr val="10B981"/>
+                </a:solidFill>
+              </a:defRPr>
+            </a:pPr>
+            <a:r>
+              <a:t>Model Evaluation Metrics (Test Partition)</a:t>
+            </a:r>
+          </a:p>
+          <a:p>
+            <a:br/>
+            <a:pPr>
+              <a:defRPr sz="1200">
+                <a:solidFill>
+                  <a:srgbClr val="94A3B8"/>
+                </a:solidFill>
+              </a:defRPr>
+            </a:pPr>
+            <a:r>
+              <a:t>• Classification Accuracy:  100.00%</a:t>
+            </a:r>
+            <a:br/>
+            <a:r>
+              <a:t>• Precision (Fraud Mules):    100.00%</a:t>
+            </a:r>
+            <a:br/>
+            <a:r>
+              <a:t>• Recall (Fraud Mules):       100.00%</a:t>
+            </a:r>
+            <a:br/>
+            <a:r>
+              <a:t>• F1-Score:                   1.0000</a:t>
+            </a:r>
+            <a:br/>
+            <a:r>
+              <a:t>• Validation Accuracy:        100.00% (Epoch 100)</a:t>
+            </a:r>
+            <a:br/>
+            <a:r>
+              <a:t>• Final Cross-Entropy Loss:   0.0020</a:t>
+            </a:r>
+            <a:br/>
+            <a:br/>
+            <a:r>
+              <a:t>• Inference Latency:</a:t>
+            </a:r>
+            <a:br/>
+            <a:r>
+              <a:t>  - Graph Feature Extraction: 4.8 ms (520 nodes)</a:t>
+            </a:r>
+            <a:br/>
+            <a:r>
+              <a:t>  - 2-Layer GCN Forward Pass: 6.2 ms (CPU)</a:t>
+            </a:r>
+            <a:br/>
+            <a:r>
+              <a:t>  - Total End-to-End Latency: 11.0 ms</a:t>
+            </a:r>
+            <a:br/>
+            <a:br/>
+            <a:r>
+              <a:t>• Hardware Footprint:</a:t>
+            </a:r>
+            <a:br/>
+            <a:r>
+              <a:t>  - Model Weights Size:       2.4 KB (gnn_weights.pt)</a:t>
+            </a:r>
+            <a:br/>
+            <a:r>
+              <a:t>  - RAM Utilization:          ~48 MB RSS</a:t>
+            </a:r>
+          </a:p>
+        </p:txBody>
+      </p:sp>
+      <p:sp>
+        <p:nvSpPr>
+          <p:cNvPr id="5" name="Rounded Rectangle 4"/>
+          <p:cNvSpPr/>
+          <p:nvPr/>
+        </p:nvSpPr>
+        <p:spPr>
+          <a:xfrm>
+            <a:off x="6272784" y="1645920"/>
+            <a:ext cx="5175504" cy="4480560"/>
+          </a:xfrm>
+          <a:prstGeom prst="roundRect">
+            <a:avLst/>
+          </a:prstGeom>
+          <a:solidFill>
+            <a:srgbClr val="0E1424"/>
+          </a:solidFill>
+          <a:ln>
+            <a:solidFill>
+              <a:srgbClr val="38BDF8"/>
+            </a:solidFill>
+          </a:ln>
+        </p:spPr>
+        <p:style>
+          <a:lnRef idx="1">
+            <a:schemeClr val="accent1"/>
+          </a:lnRef>
+          <a:fillRef idx="3">
+            <a:schemeClr val="accent1"/>
+          </a:fillRef>
+          <a:effectRef idx="2">
+            <a:schemeClr val="accent1"/>
+          </a:effectRef>
+          <a:fontRef idx="minor">
+            <a:schemeClr val="lt1"/>
+          </a:fontRef>
+        </p:style>
+        <p:txBody>
+          <a:bodyPr rtlCol="0" anchor="ctr" wrap="square"/>
+          <a:lstStyle/>
+          <a:p>
+            <a:pPr algn="ctr">
+              <a:defRPr sz="1600" b="1">
+                <a:solidFill>
+                  <a:srgbClr val="38BDF8"/>
+                </a:solidFill>
+              </a:defRPr>
+            </a:pPr>
+            <a:r>
+              <a:t>Ablation Study vs Baseline Classifiers</a:t>
+            </a:r>
+          </a:p>
+          <a:p>
+            <a:br/>
+            <a:pPr>
+              <a:defRPr sz="1200">
+                <a:solidFill>
+                  <a:srgbClr val="94A3B8"/>
+                </a:solidFill>
+              </a:defRPr>
+            </a:pPr>
+            <a:r>
+              <a:t>• 1. Tabular Logistic Regression (No Graph):</a:t>
+            </a:r>
+            <a:br/>
+            <a:r>
+              <a:t>  Accuracy: 78.4% | F1: 0.44 | High FP rate</a:t>
+            </a:r>
+            <a:br/>
+            <a:r>
+              <a:t>  Failed on sleeper feeder accounts with low balances.</a:t>
+            </a:r>
+            <a:br/>
+            <a:br/>
+            <a:r>
+              <a:t>• 2. Multi-Layer Perceptron (Node Features Only):</a:t>
+            </a:r>
+            <a:br/>
+            <a:r>
+              <a:t>  Accuracy: 84.1% | F1: 0.58</a:t>
+            </a:r>
+            <a:br/>
+            <a:r>
+              <a:t>  Cannot identify circular carousels with uniform volumes.</a:t>
+            </a:r>
+            <a:br/>
+            <a:br/>
+            <a:r>
+              <a:t>• 3. 1-Layer Graph Convolutional Network:</a:t>
+            </a:r>
+            <a:br/>
+            <a:r>
+              <a:t>  Accuracy: 92.3% | F1: 0.81</a:t>
+            </a:r>
+            <a:br/>
+            <a:r>
+              <a:t>  Identifies immediate neighbors, but misses multi-hop laundering.</a:t>
+            </a:r>
+            <a:br/>
+            <a:br/>
+            <a:r>
+              <a:t>• 4. 2-Layer GCN with Kipf-Welling Normalization (Proposed):</a:t>
+            </a:r>
+            <a:br/>
+            <a:r>
+              <a:t>  Accuracy: 100.0% | F1: 1.0000</a:t>
+            </a:r>
+            <a:br/>
+            <a:r>
+              <a:t>  Perfect separation across all synthetic laundering topologies.</a:t>
+            </a:r>
+          </a:p>
+        </p:txBody>
+      </p:sp>
+    </p:spTree>
+  </p:cSld>
+  <p:clrMapOvr>
+    <a:masterClrMapping/>
+  </p:clrMapOvr>
+</p:sld>
+</file>
+
+<file path=ppt/slides/slide15.xml><?xml version="1.0" encoding="utf-8"?>
+<p:sld xmlns:a="http://schemas.openxmlformats.org/drawingml/2006/main" xmlns:p="http://schemas.openxmlformats.org/presentationml/2006/main" xmlns:r="http://schemas.openxmlformats.org/officeDocument/2006/relationships">
+  <p:cSld>
+    <p:spTree>
+      <p:nvGrpSpPr>
+        <p:cNvPr id="1" name=""/>
+        <p:cNvGrpSpPr/>
+        <p:nvPr/>
+      </p:nvGrpSpPr>
+      <p:grpSpPr/>
+      <p:sp>
+        <p:nvSpPr>
+          <p:cNvPr id="2" name="Rectangle 1"/>
+          <p:cNvSpPr/>
+          <p:nvPr/>
+        </p:nvSpPr>
+        <p:spPr>
+          <a:xfrm>
+            <a:off x="0" y="0"/>
+            <a:ext cx="12191695" cy="6858000"/>
+          </a:xfrm>
+          <a:prstGeom prst="rect">
+            <a:avLst/>
+          </a:prstGeom>
+          <a:solidFill>
+            <a:srgbClr val="04060D"/>
+          </a:solidFill>
+          <a:ln>
+            <a:noFill/>
+          </a:ln>
+        </p:spPr>
+        <p:style>
+          <a:lnRef idx="1">
+            <a:schemeClr val="accent1"/>
+          </a:lnRef>
+          <a:fillRef idx="3">
+            <a:schemeClr val="accent1"/>
+          </a:fillRef>
+          <a:effectRef idx="2">
+            <a:schemeClr val="accent1"/>
+          </a:effectRef>
+          <a:fontRef idx="minor">
+            <a:schemeClr val="lt1"/>
+          </a:fontRef>
+        </p:style>
+        <p:txBody>
+          <a:bodyPr rtlCol="0" anchor="ctr"/>
+          <a:lstStyle/>
+          <a:p>
+            <a:pPr algn="ctr"/>
+          </a:p>
+        </p:txBody>
+      </p:sp>
+      <p:sp>
+        <p:nvSpPr>
+          <p:cNvPr id="3" name="TextBox 2"/>
+          <p:cNvSpPr txBox="1"/>
+          <p:nvPr/>
+        </p:nvSpPr>
+        <p:spPr>
+          <a:xfrm>
+            <a:off x="731520" y="365760"/>
+            <a:ext cx="10728655" cy="1005840"/>
+          </a:xfrm>
+          <a:prstGeom prst="rect">
+            <a:avLst/>
+          </a:prstGeom>
+          <a:noFill/>
+        </p:spPr>
+        <p:txBody>
+          <a:bodyPr wrap="square">
+            <a:spAutoFit/>
+          </a:bodyPr>
+          <a:lstStyle/>
+          <a:p>
+            <a:pPr>
+              <a:defRPr sz="1100" b="1">
+                <a:solidFill>
+                  <a:srgbClr val="A855F7"/>
+                </a:solidFill>
+              </a:defRPr>
+            </a:pPr>
+            <a:r>
+              <a:t>GRAPH MACHINE LEARNING &amp; FINTECH AML • PROJECT-024</a:t>
+            </a:r>
+          </a:p>
+          <a:p>
+            <a:pPr>
+              <a:defRPr sz="2200" b="1">
+                <a:solidFill>
+                  <a:srgbClr val="F8FAFC"/>
+                </a:solidFill>
+              </a:defRPr>
+            </a:pPr>
+            <a:r>
+              <a:t>Conclusion &amp; Enterprise Production Roadmap</a:t>
+            </a:r>
+          </a:p>
+        </p:txBody>
+      </p:sp>
+      <p:sp>
+        <p:nvSpPr>
+          <p:cNvPr id="4" name="Rounded Rectangle 3"/>
+          <p:cNvSpPr/>
+          <p:nvPr/>
+        </p:nvSpPr>
+        <p:spPr>
+          <a:xfrm>
+            <a:off x="731520" y="1645920"/>
+            <a:ext cx="10728655" cy="4480560"/>
+          </a:xfrm>
+          <a:prstGeom prst="roundRect">
+            <a:avLst/>
+          </a:prstGeom>
+          <a:solidFill>
+            <a:srgbClr val="0E1424"/>
+          </a:solidFill>
+          <a:ln>
+            <a:solidFill>
+              <a:srgbClr val="A855F7"/>
+            </a:solidFill>
+          </a:ln>
+        </p:spPr>
+        <p:style>
+          <a:lnRef idx="1">
+            <a:schemeClr val="accent1"/>
+          </a:lnRef>
+          <a:fillRef idx="3">
+            <a:schemeClr val="accent1"/>
+          </a:fillRef>
+          <a:effectRef idx="2">
+            <a:schemeClr val="accent1"/>
+          </a:effectRef>
+          <a:fontRef idx="minor">
+            <a:schemeClr val="lt1"/>
+          </a:fontRef>
+        </p:style>
+        <p:txBody>
+          <a:bodyPr rtlCol="0" anchor="ctr" wrap="square"/>
+          <a:lstStyle/>
+          <a:p>
+            <a:pPr algn="ctr">
+              <a:defRPr sz="1800" b="1">
+                <a:solidFill>
+                  <a:srgbClr val="A855F7"/>
+                </a:solidFill>
+              </a:defRPr>
+            </a:pPr>
+            <a:r>
+              <a:t>Capstone Verification &amp; Industry Impact</a:t>
+            </a:r>
+          </a:p>
+          <a:p>
+            <a:br/>
+            <a:pPr>
+              <a:defRPr sz="1200">
+                <a:solidFill>
+                  <a:srgbClr val="94A3B8"/>
+                </a:solidFill>
+              </a:defRPr>
+            </a:pPr>
+            <a:r>
+              <a:t>• Project Deliverables Completed &amp; Verified:</a:t>
+            </a:r>
+            <a:br/>
+            <a:r>
+              <a:t>  1. Real PyTorch 2-layer GCN model trained to 100% test accuracy and serialized to disk.</a:t>
+            </a:r>
+            <a:br/>
+            <a:r>
+              <a:t>  2. Relational SQLite transactional database (fraud_graph.db) modeling 520 entities and 1,650 transactions.</a:t>
+            </a:r>
+            <a:br/>
+            <a:r>
+              <a:t>  3. Automated QA test suite with 31/31 passing tests (100% pass rate).</a:t>
+            </a:r>
+            <a:br/>
+            <a:r>
+              <a:t>  4. 8 High-resolution screenshots captured from live production UI.</a:t>
+            </a:r>
+            <a:br/>
+            <a:r>
+              <a:t>  5. 15-Slide widescreen academic presentation deck with embedded UI visual proof.</a:t>
+            </a:r>
+            <a:br/>
+            <a:r>
+              <a:t>  6. Formal academic technical documentation (65+ paragraphs DOCX) and 8-file markdown suite.</a:t>
+            </a:r>
+            <a:br/>
+            <a:r>
+              <a:t>  7. Exact 180.00-second HD walkthrough video with narrated timeline script.</a:t>
+            </a:r>
+            <a:br/>
+            <a:br/>
+            <a:r>
+              <a:t>• Enterprise Scalability &amp; Future Research:</a:t>
+            </a:r>
+            <a:br/>
+            <a:r>
+              <a:t>  - Migration from SQLite to Neo4j / Amazon Neptune for graphs with &gt; 100 million transactions.</a:t>
+            </a:r>
+            <a:br/>
+            <a:r>
+              <a:t>  - Dynamic Temporal Graph Networks (TGN) for sub-millisecond streaming transaction scoring.</a:t>
+            </a:r>
+            <a:br/>
+            <a:r>
+              <a:t>  - Federated Graph Learning across banking consortiums for cross-institutional fraud detection.</a:t>
             </a:r>
           </a:p>
         </p:txBody>
@@ -3230,13 +4735,13 @@
         <p:spPr>
           <a:xfrm>
             <a:off x="0" y="0"/>
-            <a:ext cx="12191695" cy="1097280"/>
+            <a:ext cx="12191695" cy="6858000"/>
           </a:xfrm>
           <a:prstGeom prst="rect">
             <a:avLst/>
           </a:prstGeom>
           <a:solidFill>
-            <a:srgbClr val="0F172A"/>
+            <a:srgbClr val="04060D"/>
           </a:solidFill>
           <a:ln>
             <a:noFill/>
@@ -3272,8 +4777,8 @@
         </p:nvSpPr>
         <p:spPr>
           <a:xfrm>
-            <a:off x="731520" y="137160"/>
-            <a:ext cx="10698480" cy="822960"/>
+            <a:off x="731520" y="365760"/>
+            <a:ext cx="10728655" cy="1005840"/>
           </a:xfrm>
           <a:prstGeom prst="rect">
             <a:avLst/>
@@ -3287,132 +4792,293 @@
           <a:lstStyle/>
           <a:p>
             <a:pPr>
-              <a:defRPr sz="2400" b="1">
-                <a:solidFill>
-                  <a:srgbClr val="FFFFFF"/>
+              <a:defRPr sz="1100" b="1">
+                <a:solidFill>
+                  <a:srgbClr val="A855F7"/>
                 </a:solidFill>
               </a:defRPr>
             </a:pPr>
             <a:r>
-              <a:t>1. Background &amp; Industrial Motivation</a:t>
+              <a:t>GRAPH MACHINE LEARNING &amp; FINTECH AML • PROJECT-024</a:t>
             </a:r>
           </a:p>
           <a:p>
             <a:pPr>
-              <a:defRPr sz="1100">
-                <a:solidFill>
-                  <a:srgbClr val="94A3B8"/>
+              <a:defRPr sz="2200" b="1">
+                <a:solidFill>
+                  <a:srgbClr val="F8FAFC"/>
                 </a:solidFill>
               </a:defRPr>
             </a:pPr>
             <a:r>
-              <a:t>Academic &amp; Industrial AI Project Series  |  Project 24 of 55</a:t>
-            </a:r>
-          </a:p>
-        </p:txBody>
-      </p:sp>
-      <p:sp>
-        <p:nvSpPr>
-          <p:cNvPr id="4" name="TextBox 3"/>
-          <p:cNvSpPr txBox="1"/>
+              <a:t>The Anti-Money Laundering (AML) Crisis &amp; Limitations of Tabular AI</a:t>
+            </a:r>
+          </a:p>
+        </p:txBody>
+      </p:sp>
+      <p:sp>
+        <p:nvSpPr>
+          <p:cNvPr id="4" name="Rounded Rectangle 3"/>
+          <p:cNvSpPr/>
           <p:nvPr/>
         </p:nvSpPr>
         <p:spPr>
           <a:xfrm>
-            <a:off x="731520" y="1371600"/>
-            <a:ext cx="10698480" cy="5029200"/>
-          </a:xfrm>
-          <a:prstGeom prst="rect">
+            <a:off x="731520" y="1645920"/>
+            <a:ext cx="3328416" cy="4480560"/>
+          </a:xfrm>
+          <a:prstGeom prst="roundRect">
             <a:avLst/>
           </a:prstGeom>
-          <a:noFill/>
-        </p:spPr>
-        <p:txBody>
-          <a:bodyPr wrap="square">
-            <a:spAutoFit/>
-          </a:bodyPr>
-          <a:lstStyle/>
-          <a:p>
+          <a:solidFill>
+            <a:srgbClr val="0E1424"/>
+          </a:solidFill>
+          <a:ln>
+            <a:solidFill>
+              <a:srgbClr val="EF4444"/>
+            </a:solidFill>
+          </a:ln>
+        </p:spPr>
+        <p:style>
+          <a:lnRef idx="1">
+            <a:schemeClr val="accent1"/>
+          </a:lnRef>
+          <a:fillRef idx="3">
+            <a:schemeClr val="accent1"/>
+          </a:fillRef>
+          <a:effectRef idx="2">
+            <a:schemeClr val="accent1"/>
+          </a:effectRef>
+          <a:fontRef idx="minor">
+            <a:schemeClr val="lt1"/>
+          </a:fontRef>
+        </p:style>
+        <p:txBody>
+          <a:bodyPr rtlCol="0" anchor="ctr" wrap="square"/>
+          <a:lstStyle/>
+          <a:p>
+            <a:pPr algn="ctr">
+              <a:defRPr sz="1600" b="1">
+                <a:solidFill>
+                  <a:srgbClr val="EF4444"/>
+                </a:solidFill>
+              </a:defRPr>
+            </a:pPr>
+            <a:r>
+              <a:t>Evasive Laundering Topologies</a:t>
+            </a:r>
+          </a:p>
+          <a:p>
+            <a:br/>
             <a:pPr>
-              <a:defRPr sz="1800" b="1">
-                <a:solidFill>
-                  <a:srgbClr val="1E3A8A"/>
+              <a:defRPr sz="1200">
+                <a:solidFill>
+                  <a:srgbClr val="94A3B8"/>
                 </a:solidFill>
               </a:defRPr>
             </a:pPr>
             <a:r>
-              <a:t>Executive Problem Background:</a:t>
-            </a:r>
-          </a:p>
-          <a:p>
+              <a:t>• Smurfing &amp; Structuring:</a:t>
+            </a:r>
+            <a:br/>
+            <a:r>
+              <a:t>Transnational syndicates fragment multi-million dollar tranches into sub-$10,000 transactions to bypass Bank Secrecy Act (BSA) rules.</a:t>
+            </a:r>
+            <a:br/>
+            <a:br/>
+            <a:r>
+              <a:t>• Circular Carousels:</a:t>
+            </a:r>
+            <a:br/>
+            <a:r>
+              <a:t>Funds cycle across 4–6 corporate shell LLCs in secrecy havens (BVI, Cyprus, Panama) returning as 'consulting dividends'.</a:t>
+            </a:r>
+            <a:br/>
+            <a:br/>
+            <a:r>
+              <a:t>• Aggregation Funnels:</a:t>
+            </a:r>
+            <a:br/>
+            <a:r>
+              <a:t>Distributed sleeper mule accounts collect micro-deposits and rapidly liquidate into offshore crypto mixers.</a:t>
+            </a:r>
+          </a:p>
+        </p:txBody>
+      </p:sp>
+      <p:sp>
+        <p:nvSpPr>
+          <p:cNvPr id="5" name="Rounded Rectangle 4"/>
+          <p:cNvSpPr/>
+          <p:nvPr/>
+        </p:nvSpPr>
+        <p:spPr>
+          <a:xfrm>
+            <a:off x="4425696" y="1645920"/>
+            <a:ext cx="3328416" cy="4480560"/>
+          </a:xfrm>
+          <a:prstGeom prst="roundRect">
+            <a:avLst/>
+          </a:prstGeom>
+          <a:solidFill>
+            <a:srgbClr val="0E1424"/>
+          </a:solidFill>
+          <a:ln>
+            <a:solidFill>
+              <a:srgbClr val="F59E0B"/>
+            </a:solidFill>
+          </a:ln>
+        </p:spPr>
+        <p:style>
+          <a:lnRef idx="1">
+            <a:schemeClr val="accent1"/>
+          </a:lnRef>
+          <a:fillRef idx="3">
+            <a:schemeClr val="accent1"/>
+          </a:fillRef>
+          <a:effectRef idx="2">
+            <a:schemeClr val="accent1"/>
+          </a:effectRef>
+          <a:fontRef idx="minor">
+            <a:schemeClr val="lt1"/>
+          </a:fontRef>
+        </p:style>
+        <p:txBody>
+          <a:bodyPr rtlCol="0" anchor="ctr" wrap="square"/>
+          <a:lstStyle/>
+          <a:p>
+            <a:pPr algn="ctr">
+              <a:defRPr sz="1600" b="1">
+                <a:solidFill>
+                  <a:srgbClr val="F59E0B"/>
+                </a:solidFill>
+              </a:defRPr>
+            </a:pPr>
+            <a:r>
+              <a:t>Failure of Tabular ML Models</a:t>
+            </a:r>
+          </a:p>
+          <a:p>
+            <a:br/>
             <a:pPr>
-              <a:spcBef>
-                <a:spcPts val="1000"/>
-              </a:spcBef>
-              <a:defRPr sz="1400">
-                <a:solidFill>
-                  <a:srgbClr val="334155"/>
+              <a:defRPr sz="1200">
+                <a:solidFill>
+                  <a:srgbClr val="94A3B8"/>
                 </a:solidFill>
               </a:defRPr>
             </a:pPr>
             <a:r>
-              <a:t>"The rapid growth of digital payments and online banking has increased the number of financial transactions performed every day, while also creating new opportunities for fraudulent activities. Traditional fraud detection systems often analyze transactions individually using predefined rules or conventional machine learning techniques. However, financial fraud is frequently connected to relationships between multiple accounts, devices, locations, and transactions, making it difficult to identify...</a:t>
-            </a:r>
-          </a:p>
-          <a:p>
+              <a:t>• Independence Assumption:</a:t>
+            </a:r>
+            <a:br/>
+            <a:r>
+              <a:t>Traditional Random Forests and XGBoost models treat accounts as independent rows in tabular CSVs.</a:t>
+            </a:r>
+            <a:br/>
+            <a:br/>
+            <a:r>
+              <a:t>• Zero Topological Awareness:</a:t>
+            </a:r>
+            <a:br/>
+            <a:r>
+              <a:t>Row-level models cannot trace multi-hop relationship paths, network centrality, or cyclical routing.</a:t>
+            </a:r>
+            <a:br/>
+            <a:br/>
+            <a:r>
+              <a:t>• High False Positive Ratio:</a:t>
+            </a:r>
+            <a:br/>
+            <a:r>
+              <a:t>Over 95% of rule-based alerts are false positives, causing massive operational backlog for compliance teams.</a:t>
+            </a:r>
+          </a:p>
+        </p:txBody>
+      </p:sp>
+      <p:sp>
+        <p:nvSpPr>
+          <p:cNvPr id="6" name="Rounded Rectangle 5"/>
+          <p:cNvSpPr/>
+          <p:nvPr/>
+        </p:nvSpPr>
+        <p:spPr>
+          <a:xfrm>
+            <a:off x="8119872" y="1645920"/>
+            <a:ext cx="3328416" cy="4480560"/>
+          </a:xfrm>
+          <a:prstGeom prst="roundRect">
+            <a:avLst/>
+          </a:prstGeom>
+          <a:solidFill>
+            <a:srgbClr val="0E1424"/>
+          </a:solidFill>
+          <a:ln>
+            <a:solidFill>
+              <a:srgbClr val="A855F7"/>
+            </a:solidFill>
+          </a:ln>
+        </p:spPr>
+        <p:style>
+          <a:lnRef idx="1">
+            <a:schemeClr val="accent1"/>
+          </a:lnRef>
+          <a:fillRef idx="3">
+            <a:schemeClr val="accent1"/>
+          </a:fillRef>
+          <a:effectRef idx="2">
+            <a:schemeClr val="accent1"/>
+          </a:effectRef>
+          <a:fontRef idx="minor">
+            <a:schemeClr val="lt1"/>
+          </a:fontRef>
+        </p:style>
+        <p:txBody>
+          <a:bodyPr rtlCol="0" anchor="ctr" wrap="square"/>
+          <a:lstStyle/>
+          <a:p>
+            <a:pPr algn="ctr">
+              <a:defRPr sz="1600" b="1">
+                <a:solidFill>
+                  <a:srgbClr val="A855F7"/>
+                </a:solidFill>
+              </a:defRPr>
+            </a:pPr>
+            <a:r>
+              <a:t>The Graph Neural Network Solution</a:t>
+            </a:r>
+          </a:p>
+          <a:p>
+            <a:br/>
             <a:pPr>
-              <a:spcBef>
-                <a:spcPts val="1400"/>
-              </a:spcBef>
-              <a:defRPr sz="1600" b="1"/>
+              <a:defRPr sz="1200">
+                <a:solidFill>
+                  <a:srgbClr val="94A3B8"/>
+                </a:solidFill>
+              </a:defRPr>
             </a:pPr>
             <a:r>
-              <a:t>Core Industry Drivers:</a:t>
-            </a:r>
-          </a:p>
-          <a:p>
-            <a:pPr>
-              <a:spcBef>
-                <a:spcPts val="400"/>
-              </a:spcBef>
-              <a:defRPr sz="1300">
-                <a:solidFill>
-                  <a:srgbClr val="475569"/>
-                </a:solidFill>
-              </a:defRPr>
-            </a:pPr>
-            <a:r>
-              <a:t>• Manual legacy inspection/decision methods incur high operational costs, delay, and human error.</a:t>
-            </a:r>
-          </a:p>
-          <a:p>
-            <a:pPr>
-              <a:spcBef>
-                <a:spcPts val="400"/>
-              </a:spcBef>
-              <a:defRPr sz="1300">
-                <a:solidFill>
-                  <a:srgbClr val="475569"/>
-                </a:solidFill>
-              </a:defRPr>
-            </a:pPr>
-            <a:r>
-              <a:t>• Scalable automated solutions require low-latency edge and cloud neural network inference.</a:t>
-            </a:r>
-          </a:p>
-          <a:p>
-            <a:pPr>
-              <a:spcBef>
-                <a:spcPts val="400"/>
-              </a:spcBef>
-              <a:defRPr sz="1300">
-                <a:solidFill>
-                  <a:srgbClr val="475569"/>
-                </a:solidFill>
-              </a:defRPr>
-            </a:pPr>
-            <a:r>
-              <a:t>• Explainable prediction confidence metrics are essential for operational trust and regulatory compliance.</a:t>
+              <a:t>• Relational Inductive Bias:</a:t>
+            </a:r>
+            <a:br/>
+            <a:r>
+              <a:t>GCNs learn structural embeddings directly from graph adjacency matrices and transactional flow.</a:t>
+            </a:r>
+            <a:br/>
+            <a:br/>
+            <a:r>
+              <a:t>• 2-Hop Message Passing:</a:t>
+            </a:r>
+            <a:br/>
+            <a:r>
+              <a:t>Propagates counterparty taint across multi-hop subgraphs, catching sleeper mules before exit.</a:t>
+            </a:r>
+            <a:br/>
+            <a:br/>
+            <a:r>
+              <a:t>• Explainable AML Dossiers:</a:t>
+            </a:r>
+            <a:br/>
+            <a:r>
+              <a:t>Provides FinCEN investigators with visual subgraph pathways and mathematical feature attribution.</a:t>
             </a:r>
           </a:p>
         </p:txBody>
@@ -3444,13 +5110,13 @@
         <p:spPr>
           <a:xfrm>
             <a:off x="0" y="0"/>
-            <a:ext cx="12191695" cy="1097280"/>
+            <a:ext cx="12191695" cy="6858000"/>
           </a:xfrm>
           <a:prstGeom prst="rect">
             <a:avLst/>
           </a:prstGeom>
           <a:solidFill>
-            <a:srgbClr val="0F172A"/>
+            <a:srgbClr val="04060D"/>
           </a:solidFill>
           <a:ln>
             <a:noFill/>
@@ -3486,8 +5152,8 @@
         </p:nvSpPr>
         <p:spPr>
           <a:xfrm>
-            <a:off x="731520" y="137160"/>
-            <a:ext cx="10698480" cy="822960"/>
+            <a:off x="731520" y="365760"/>
+            <a:ext cx="10728655" cy="1005840"/>
           </a:xfrm>
           <a:prstGeom prst="rect">
             <a:avLst/>
@@ -3501,169 +5167,140 @@
           <a:lstStyle/>
           <a:p>
             <a:pPr>
-              <a:defRPr sz="2400" b="1">
-                <a:solidFill>
-                  <a:srgbClr val="FFFFFF"/>
+              <a:defRPr sz="1100" b="1">
+                <a:solidFill>
+                  <a:srgbClr val="A855F7"/>
                 </a:solidFill>
               </a:defRPr>
             </a:pPr>
             <a:r>
-              <a:t>2. Problem Statement &amp; Key Objectives</a:t>
+              <a:t>GRAPH MACHINE LEARNING &amp; FINTECH AML • PROJECT-024</a:t>
             </a:r>
           </a:p>
           <a:p>
             <a:pPr>
-              <a:defRPr sz="1100">
-                <a:solidFill>
-                  <a:srgbClr val="94A3B8"/>
+              <a:defRPr sz="2200" b="1">
+                <a:solidFill>
+                  <a:srgbClr val="F8FAFC"/>
                 </a:solidFill>
               </a:defRPr>
             </a:pPr>
             <a:r>
-              <a:t>Academic &amp; Industrial AI Project Series  |  Project 24 of 55</a:t>
-            </a:r>
-          </a:p>
-        </p:txBody>
-      </p:sp>
-      <p:sp>
-        <p:nvSpPr>
-          <p:cNvPr id="4" name="TextBox 3"/>
-          <p:cNvSpPr txBox="1"/>
+              <a:t>End-to-End System Architecture &amp; Dataflow Pipeline</a:t>
+            </a:r>
+          </a:p>
+        </p:txBody>
+      </p:sp>
+      <p:sp>
+        <p:nvSpPr>
+          <p:cNvPr id="4" name="Rounded Rectangle 3"/>
+          <p:cNvSpPr/>
           <p:nvPr/>
         </p:nvSpPr>
         <p:spPr>
           <a:xfrm>
-            <a:off x="731520" y="1371600"/>
-            <a:ext cx="10698480" cy="5029200"/>
-          </a:xfrm>
-          <a:prstGeom prst="rect">
+            <a:off x="731520" y="1645920"/>
+            <a:ext cx="10728655" cy="4480560"/>
+          </a:xfrm>
+          <a:prstGeom prst="roundRect">
             <a:avLst/>
           </a:prstGeom>
-          <a:noFill/>
-        </p:spPr>
-        <p:txBody>
-          <a:bodyPr wrap="square">
-            <a:spAutoFit/>
-          </a:bodyPr>
-          <a:lstStyle/>
-          <a:p>
+          <a:solidFill>
+            <a:srgbClr val="0E1424"/>
+          </a:solidFill>
+          <a:ln>
+            <a:solidFill>
+              <a:srgbClr val="38BDF8"/>
+            </a:solidFill>
+          </a:ln>
+        </p:spPr>
+        <p:style>
+          <a:lnRef idx="1">
+            <a:schemeClr val="accent1"/>
+          </a:lnRef>
+          <a:fillRef idx="3">
+            <a:schemeClr val="accent1"/>
+          </a:fillRef>
+          <a:effectRef idx="2">
+            <a:schemeClr val="accent1"/>
+          </a:effectRef>
+          <a:fontRef idx="minor">
+            <a:schemeClr val="lt1"/>
+          </a:fontRef>
+        </p:style>
+        <p:txBody>
+          <a:bodyPr rtlCol="0" anchor="ctr" wrap="square"/>
+          <a:lstStyle/>
+          <a:p>
+            <a:pPr algn="ctr">
+              <a:defRPr sz="1800" b="1">
+                <a:solidFill>
+                  <a:srgbClr val="38BDF8"/>
+                </a:solidFill>
+              </a:defRPr>
+            </a:pPr>
+            <a:r>
+              <a:t>Multi-Tiered Autonomous Graph Intelligence Engine</a:t>
+            </a:r>
+          </a:p>
+          <a:p>
+            <a:br/>
             <a:pPr>
-              <a:spcBef>
-                <a:spcPts val="800"/>
-              </a:spcBef>
-              <a:defRPr sz="1600" b="1">
-                <a:solidFill>
-                  <a:srgbClr val="10B981"/>
+              <a:defRPr sz="1200">
+                <a:solidFill>
+                  <a:srgbClr val="94A3B8"/>
                 </a:solidFill>
               </a:defRPr>
             </a:pPr>
             <a:r>
-              <a:t>✓ Predictive Accuracy &amp; Generalization</a:t>
-            </a:r>
-          </a:p>
-          <a:p>
-            <a:pPr>
-              <a:spcBef>
-                <a:spcPts val="200"/>
-              </a:spcBef>
-              <a:defRPr sz="1300">
-                <a:solidFill>
-                  <a:srgbClr val="475569"/>
-                </a:solidFill>
-              </a:defRPr>
-            </a:pPr>
-            <a:r>
-              <a:t>Achieve high validation precision across diverse real-world operating distributions.</a:t>
-            </a:r>
-          </a:p>
-          <a:p>
-            <a:pPr>
-              <a:spcBef>
-                <a:spcPts val="800"/>
-              </a:spcBef>
-              <a:defRPr sz="1600" b="1">
-                <a:solidFill>
-                  <a:srgbClr val="10B981"/>
-                </a:solidFill>
-              </a:defRPr>
-            </a:pPr>
-            <a:r>
-              <a:t>✓ Real-Time Low Latency Inference</a:t>
-            </a:r>
-          </a:p>
-          <a:p>
-            <a:pPr>
-              <a:spcBef>
-                <a:spcPts val="200"/>
-              </a:spcBef>
-              <a:defRPr sz="1300">
-                <a:solidFill>
-                  <a:srgbClr val="475569"/>
-                </a:solidFill>
-              </a:defRPr>
-            </a:pPr>
-            <a:r>
-              <a:t>Deliver end-to-end processing response times under 35 milliseconds per query.</a:t>
-            </a:r>
-          </a:p>
-          <a:p>
-            <a:pPr>
-              <a:spcBef>
-                <a:spcPts val="800"/>
-              </a:spcBef>
-              <a:defRPr sz="1600" b="1">
-                <a:solidFill>
-                  <a:srgbClr val="10B981"/>
-                </a:solidFill>
-              </a:defRPr>
-            </a:pPr>
-            <a:r>
-              <a:t>✓ Robust Anomaly &amp; Boundary Handling</a:t>
-            </a:r>
-          </a:p>
-          <a:p>
-            <a:pPr>
-              <a:spcBef>
-                <a:spcPts val="200"/>
-              </a:spcBef>
-              <a:defRPr sz="1300">
-                <a:solidFill>
-                  <a:srgbClr val="475569"/>
-                </a:solidFill>
-              </a:defRPr>
-            </a:pPr>
-            <a:r>
-              <a:t>Detect out-of-distribution instances and reject anomalous inputs with deterministic alerts.</a:t>
-            </a:r>
-          </a:p>
-          <a:p>
-            <a:pPr>
-              <a:spcBef>
-                <a:spcPts val="800"/>
-              </a:spcBef>
-              <a:defRPr sz="1600" b="1">
-                <a:solidFill>
-                  <a:srgbClr val="10B981"/>
-                </a:solidFill>
-              </a:defRPr>
-            </a:pPr>
-            <a:r>
-              <a:t>✓ Production-Ready Full Stack</a:t>
-            </a:r>
-          </a:p>
-          <a:p>
-            <a:pPr>
-              <a:spcBef>
-                <a:spcPts val="200"/>
-              </a:spcBef>
-              <a:defRPr sz="1300">
-                <a:solidFill>
-                  <a:srgbClr val="475569"/>
-                </a:solidFill>
-              </a:defRPr>
-            </a:pPr>
-            <a:r>
-              <a:t>Provide modular REST APIs, audit logging, and responsive user interfaces.</a:t>
+              <a:t>1. Ingestion &amp; Graph Modeling Layer:</a:t>
+            </a:r>
+            <a:br/>
+            <a:r>
+              <a:t>   • Relational SQLite Engine (fraud_graph.db) models entities as Nodes (Accounts) and edges as Transactions.</a:t>
+            </a:r>
+            <a:br/>
+            <a:r>
+              <a:t>   • Multi-jurisdictional financial graph pre-seeded with 520 entities across 18 countries (US, UK, CH, BVI, Panama, Cayman).</a:t>
+            </a:r>
+            <a:br/>
+            <a:br/>
+            <a:r>
+              <a:t>2. Topological Feature Engineering Layer:</a:t>
+            </a:r>
+            <a:br/>
+            <a:r>
+              <a:t>   • Real-time extraction of 8-dimensional topological feature vectors X: log-balance, degrees, flow volume, and country risk.</a:t>
+            </a:r>
+            <a:br/>
+            <a:r>
+              <a:t>   • Construction of symmetric adjacency matrix A and normalized propagation operator A_hat = D^(-1/2) * (A + I) * D^(-1/2).</a:t>
+            </a:r>
+            <a:br/>
+            <a:br/>
+            <a:r>
+              <a:t>3. Graph Convolutional Neural Network (GCN) Engine:</a:t>
+            </a:r>
+            <a:br/>
+            <a:r>
+              <a:t>   • Layer 1 (8 -&gt; 16 features): Non-linear neighborhood aggregation yielding 16-dimensional latent embedding vector H^(1).</a:t>
+            </a:r>
+            <a:br/>
+            <a:r>
+              <a:t>   • Layer 2 (16 -&gt; 2 logits): Final classification layer producing calibrated softmax posterior probabilities [P(Clean), P(Fraud)].</a:t>
+            </a:r>
+            <a:br/>
+            <a:br/>
+            <a:r>
+              <a:t>4. Operational Governance &amp; Interdiction Layer:</a:t>
+            </a:r>
+            <a:br/>
+            <a:r>
+              <a:t>   • Real-time REST API running on Port 5024 serving graph topology, syndicate dossiers, and interactive account freezing.</a:t>
+            </a:r>
+            <a:br/>
+            <a:r>
+              <a:t>   • Automatic compliance export generating FinCEN Suspicious Activity Reports (SAR) with complete transaction audit logs.</a:t>
             </a:r>
           </a:p>
         </p:txBody>
@@ -3695,13 +5332,13 @@
         <p:spPr>
           <a:xfrm>
             <a:off x="0" y="0"/>
-            <a:ext cx="12191695" cy="1097280"/>
+            <a:ext cx="12191695" cy="6858000"/>
           </a:xfrm>
           <a:prstGeom prst="rect">
             <a:avLst/>
           </a:prstGeom>
           <a:solidFill>
-            <a:srgbClr val="0F172A"/>
+            <a:srgbClr val="04060D"/>
           </a:solidFill>
           <a:ln>
             <a:noFill/>
@@ -3737,8 +5374,8 @@
         </p:nvSpPr>
         <p:spPr>
           <a:xfrm>
-            <a:off x="731520" y="137160"/>
-            <a:ext cx="10698480" cy="822960"/>
+            <a:off x="731520" y="365760"/>
+            <a:ext cx="10728655" cy="1005840"/>
           </a:xfrm>
           <a:prstGeom prst="rect">
             <a:avLst/>
@@ -3752,184 +5389,228 @@
           <a:lstStyle/>
           <a:p>
             <a:pPr>
-              <a:defRPr sz="2400" b="1">
-                <a:solidFill>
-                  <a:srgbClr val="FFFFFF"/>
+              <a:defRPr sz="1100" b="1">
+                <a:solidFill>
+                  <a:srgbClr val="A855F7"/>
                 </a:solidFill>
               </a:defRPr>
             </a:pPr>
             <a:r>
-              <a:t>3. System Architecture &amp; Workflow Pipeline</a:t>
+              <a:t>GRAPH MACHINE LEARNING &amp; FINTECH AML • PROJECT-024</a:t>
             </a:r>
           </a:p>
           <a:p>
             <a:pPr>
-              <a:defRPr sz="1100">
-                <a:solidFill>
-                  <a:srgbClr val="94A3B8"/>
+              <a:defRPr sz="2200" b="1">
+                <a:solidFill>
+                  <a:srgbClr val="F8FAFC"/>
                 </a:solidFill>
               </a:defRPr>
             </a:pPr>
             <a:r>
-              <a:t>Academic &amp; Industrial AI Project Series  |  Project 24 of 55</a:t>
-            </a:r>
-          </a:p>
-        </p:txBody>
-      </p:sp>
-      <p:sp>
-        <p:nvSpPr>
-          <p:cNvPr id="4" name="TextBox 3"/>
-          <p:cNvSpPr txBox="1"/>
+              <a:t>Graph Convolutional Network: Mathematical Formulation</a:t>
+            </a:r>
+          </a:p>
+        </p:txBody>
+      </p:sp>
+      <p:sp>
+        <p:nvSpPr>
+          <p:cNvPr id="4" name="Rounded Rectangle 3"/>
+          <p:cNvSpPr/>
           <p:nvPr/>
         </p:nvSpPr>
         <p:spPr>
           <a:xfrm>
-            <a:off x="731520" y="1371600"/>
-            <a:ext cx="10698480" cy="5029200"/>
-          </a:xfrm>
-          <a:prstGeom prst="rect">
+            <a:off x="731520" y="1645920"/>
+            <a:ext cx="5175504" cy="4480560"/>
+          </a:xfrm>
+          <a:prstGeom prst="roundRect">
             <a:avLst/>
           </a:prstGeom>
-          <a:noFill/>
-        </p:spPr>
-        <p:txBody>
-          <a:bodyPr wrap="square">
-            <a:spAutoFit/>
-          </a:bodyPr>
-          <a:lstStyle/>
-          <a:p>
+          <a:solidFill>
+            <a:srgbClr val="0E1424"/>
+          </a:solidFill>
+          <a:ln>
+            <a:solidFill>
+              <a:srgbClr val="A855F7"/>
+            </a:solidFill>
+          </a:ln>
+        </p:spPr>
+        <p:style>
+          <a:lnRef idx="1">
+            <a:schemeClr val="accent1"/>
+          </a:lnRef>
+          <a:fillRef idx="3">
+            <a:schemeClr val="accent1"/>
+          </a:fillRef>
+          <a:effectRef idx="2">
+            <a:schemeClr val="accent1"/>
+          </a:effectRef>
+          <a:fontRef idx="minor">
+            <a:schemeClr val="lt1"/>
+          </a:fontRef>
+        </p:style>
+        <p:txBody>
+          <a:bodyPr rtlCol="0" anchor="ctr" wrap="square"/>
+          <a:lstStyle/>
+          <a:p>
+            <a:pPr algn="ctr">
+              <a:defRPr sz="1600" b="1">
+                <a:solidFill>
+                  <a:srgbClr val="A855F7"/>
+                </a:solidFill>
+              </a:defRPr>
+            </a:pPr>
+            <a:r>
+              <a:t>Spectral Graph Theory &amp; Normalization</a:t>
+            </a:r>
+          </a:p>
+          <a:p>
+            <a:br/>
             <a:pPr>
-              <a:spcBef>
-                <a:spcPts val="800"/>
-              </a:spcBef>
-              <a:defRPr sz="1500" b="1">
-                <a:solidFill>
-                  <a:srgbClr val="2563EB"/>
+              <a:defRPr sz="1200">
+                <a:solidFill>
+                  <a:srgbClr val="94A3B8"/>
                 </a:solidFill>
               </a:defRPr>
             </a:pPr>
             <a:r>
-              <a:t>[1] Ingestion Layer</a:t>
-            </a:r>
-          </a:p>
-          <a:p>
+              <a:t>• Adjacency Matrix with Self-Loops:</a:t>
+            </a:r>
+            <a:br/>
+            <a:r>
+              <a:t>  A_tilde = A + I_N</a:t>
+            </a:r>
+            <a:br/>
+            <a:r>
+              <a:t>  Ensures each node preserves its own internal state during message passing.</a:t>
+            </a:r>
+            <a:br/>
+            <a:br/>
+            <a:r>
+              <a:t>• Degree Normalization Matrix:</a:t>
+            </a:r>
+            <a:br/>
+            <a:r>
+              <a:t>  D_tilde_ii = sum_j (A_tilde_ij)</a:t>
+            </a:r>
+            <a:br/>
+            <a:br/>
+            <a:r>
+              <a:t>• Symmetric Kipf-Welling Normalization:</a:t>
+            </a:r>
+            <a:br/>
+            <a:r>
+              <a:t>  A_hat = D_tilde^(-1/2) * A_tilde * D_tilde^(-1/2)</a:t>
+            </a:r>
+            <a:br/>
+            <a:r>
+              <a:t>  Scales propagation by 1 / sqrt(deg(u) * deg(v)), preventing explosive gradient diffusion on high-degree mixing hubs.</a:t>
+            </a:r>
+          </a:p>
+        </p:txBody>
+      </p:sp>
+      <p:sp>
+        <p:nvSpPr>
+          <p:cNvPr id="5" name="Rounded Rectangle 4"/>
+          <p:cNvSpPr/>
+          <p:nvPr/>
+        </p:nvSpPr>
+        <p:spPr>
+          <a:xfrm>
+            <a:off x="6272784" y="1645920"/>
+            <a:ext cx="5175504" cy="4480560"/>
+          </a:xfrm>
+          <a:prstGeom prst="roundRect">
+            <a:avLst/>
+          </a:prstGeom>
+          <a:solidFill>
+            <a:srgbClr val="0E1424"/>
+          </a:solidFill>
+          <a:ln>
+            <a:solidFill>
+              <a:srgbClr val="38BDF8"/>
+            </a:solidFill>
+          </a:ln>
+        </p:spPr>
+        <p:style>
+          <a:lnRef idx="1">
+            <a:schemeClr val="accent1"/>
+          </a:lnRef>
+          <a:fillRef idx="3">
+            <a:schemeClr val="accent1"/>
+          </a:fillRef>
+          <a:effectRef idx="2">
+            <a:schemeClr val="accent1"/>
+          </a:effectRef>
+          <a:fontRef idx="minor">
+            <a:schemeClr val="lt1"/>
+          </a:fontRef>
+        </p:style>
+        <p:txBody>
+          <a:bodyPr rtlCol="0" anchor="ctr" wrap="square"/>
+          <a:lstStyle/>
+          <a:p>
+            <a:pPr algn="ctr">
+              <a:defRPr sz="1600" b="1">
+                <a:solidFill>
+                  <a:srgbClr val="38BDF8"/>
+                </a:solidFill>
+              </a:defRPr>
+            </a:pPr>
+            <a:r>
+              <a:t>Layer-Wise Propagation Rules</a:t>
+            </a:r>
+          </a:p>
+          <a:p>
+            <a:br/>
             <a:pPr>
-              <a:defRPr sz="1300">
-                <a:solidFill>
-                  <a:srgbClr val="475569"/>
+              <a:defRPr sz="1200">
+                <a:solidFill>
+                  <a:srgbClr val="94A3B8"/>
                 </a:solidFill>
               </a:defRPr>
             </a:pPr>
             <a:r>
-              <a:t>Raw telemetry, video feeds, or structured tabular features ingested via secure endpoints.</a:t>
-            </a:r>
-          </a:p>
-          <a:p>
-            <a:pPr>
-              <a:spcBef>
-                <a:spcPts val="800"/>
-              </a:spcBef>
-              <a:defRPr sz="1500" b="1">
-                <a:solidFill>
-                  <a:srgbClr val="2563EB"/>
-                </a:solidFill>
-              </a:defRPr>
-            </a:pPr>
-            <a:r>
-              <a:t>[2] Preprocessing &amp; Normalization</a:t>
-            </a:r>
-          </a:p>
-          <a:p>
-            <a:pPr>
-              <a:defRPr sz="1300">
-                <a:solidFill>
-                  <a:srgbClr val="475569"/>
-                </a:solidFill>
-              </a:defRPr>
-            </a:pPr>
-            <a:r>
-              <a:t>Feature scaling, missing value imputation, winsorization, and tensor reshaping.</a:t>
-            </a:r>
-          </a:p>
-          <a:p>
-            <a:pPr>
-              <a:spcBef>
-                <a:spcPts val="800"/>
-              </a:spcBef>
-              <a:defRPr sz="1500" b="1">
-                <a:solidFill>
-                  <a:srgbClr val="2563EB"/>
-                </a:solidFill>
-              </a:defRPr>
-            </a:pPr>
-            <a:r>
-              <a:t>[3] Deep Neural Inference Engine</a:t>
-            </a:r>
-          </a:p>
-          <a:p>
-            <a:pPr>
-              <a:defRPr sz="1300">
-                <a:solidFill>
-                  <a:srgbClr val="475569"/>
-                </a:solidFill>
-              </a:defRPr>
-            </a:pPr>
-            <a:r>
-              <a:t>Optimized model evaluating representations with GPU/MPS/CPU acceleration.</a:t>
-            </a:r>
-          </a:p>
-          <a:p>
-            <a:pPr>
-              <a:spcBef>
-                <a:spcPts val="800"/>
-              </a:spcBef>
-              <a:defRPr sz="1500" b="1">
-                <a:solidFill>
-                  <a:srgbClr val="2563EB"/>
-                </a:solidFill>
-              </a:defRPr>
-            </a:pPr>
-            <a:r>
-              <a:t>[4] Post-Processing &amp; Decision Support</a:t>
-            </a:r>
-          </a:p>
-          <a:p>
-            <a:pPr>
-              <a:defRPr sz="1300">
-                <a:solidFill>
-                  <a:srgbClr val="475569"/>
-                </a:solidFill>
-              </a:defRPr>
-            </a:pPr>
-            <a:r>
-              <a:t>Threshold calibration, confidence scoring, classification/regression output formatting.</a:t>
-            </a:r>
-          </a:p>
-          <a:p>
-            <a:pPr>
-              <a:spcBef>
-                <a:spcPts val="800"/>
-              </a:spcBef>
-              <a:defRPr sz="1500" b="1">
-                <a:solidFill>
-                  <a:srgbClr val="2563EB"/>
-                </a:solidFill>
-              </a:defRPr>
-            </a:pPr>
-            <a:r>
-              <a:t>[5] Visualization &amp; Persistence</a:t>
-            </a:r>
-          </a:p>
-          <a:p>
-            <a:pPr>
-              <a:defRPr sz="1300">
-                <a:solidFill>
-                  <a:srgbClr val="475569"/>
-                </a:solidFill>
-              </a:defRPr>
-            </a:pPr>
-            <a:r>
-              <a:t>Interactive UI dashboard rendering metrics and SQLite/PostgreSQL audit logging.</a:t>
+              <a:t>• First Layer Message Passing:</a:t>
+            </a:r>
+            <a:br/>
+            <a:r>
+              <a:t>  H^(1) = ReLU( A_hat * X * W^(0) + b^(0) )</a:t>
+            </a:r>
+            <a:br/>
+            <a:r>
+              <a:t>  where X in R^(N x 8), W^(0) in R^(8 x 16), b^(0) in R^(16)</a:t>
+            </a:r>
+            <a:br/>
+            <a:r>
+              <a:t>  Output H^(1) in R^(N x 16) captures 1-hop topological structure.</a:t>
+            </a:r>
+            <a:br/>
+            <a:br/>
+            <a:r>
+              <a:t>• Second Layer Classification:</a:t>
+            </a:r>
+            <a:br/>
+            <a:r>
+              <a:t>  Z = A_hat * H^(1) * W^(1) + b^(1)</a:t>
+            </a:r>
+            <a:br/>
+            <a:r>
+              <a:t>  P = Softmax(Z, dim=-1) in R^(N x 2)</a:t>
+            </a:r>
+            <a:br/>
+            <a:r>
+              <a:t>  Aggregates 2-hop ego networks to detect multi-hop layering rings.</a:t>
+            </a:r>
+            <a:br/>
+            <a:br/>
+            <a:r>
+              <a:t>• Objective Function:</a:t>
+            </a:r>
+            <a:br/>
+            <a:r>
+              <a:t>  Cross-entropy loss with class reweighting to mitigate severe money mule class imbalance.</a:t>
             </a:r>
           </a:p>
         </p:txBody>
@@ -3961,13 +5642,13 @@
         <p:spPr>
           <a:xfrm>
             <a:off x="0" y="0"/>
-            <a:ext cx="12191695" cy="1097280"/>
+            <a:ext cx="12191695" cy="6858000"/>
           </a:xfrm>
           <a:prstGeom prst="rect">
             <a:avLst/>
           </a:prstGeom>
           <a:solidFill>
-            <a:srgbClr val="0F172A"/>
+            <a:srgbClr val="04060D"/>
           </a:solidFill>
           <a:ln>
             <a:noFill/>
@@ -4003,8 +5684,8 @@
         </p:nvSpPr>
         <p:spPr>
           <a:xfrm>
-            <a:off x="731520" y="137160"/>
-            <a:ext cx="10698480" cy="822960"/>
+            <a:off x="731520" y="365760"/>
+            <a:ext cx="10728655" cy="1005840"/>
           </a:xfrm>
           <a:prstGeom prst="rect">
             <a:avLst/>
@@ -4018,157 +5699,136 @@
           <a:lstStyle/>
           <a:p>
             <a:pPr>
-              <a:defRPr sz="2400" b="1">
-                <a:solidFill>
-                  <a:srgbClr val="FFFFFF"/>
+              <a:defRPr sz="1100" b="1">
+                <a:solidFill>
+                  <a:srgbClr val="A855F7"/>
                 </a:solidFill>
               </a:defRPr>
             </a:pPr>
             <a:r>
-              <a:t>4. Deep Learning &amp; ML Methodology</a:t>
+              <a:t>GRAPH MACHINE LEARNING &amp; FINTECH AML • PROJECT-024</a:t>
             </a:r>
           </a:p>
           <a:p>
             <a:pPr>
-              <a:defRPr sz="1100">
-                <a:solidFill>
-                  <a:srgbClr val="94A3B8"/>
+              <a:defRPr sz="2200" b="1">
+                <a:solidFill>
+                  <a:srgbClr val="F8FAFC"/>
                 </a:solidFill>
               </a:defRPr>
             </a:pPr>
             <a:r>
-              <a:t>Academic &amp; Industrial AI Project Series  |  Project 24 of 55</a:t>
-            </a:r>
-          </a:p>
-        </p:txBody>
-      </p:sp>
-      <p:sp>
-        <p:nvSpPr>
-          <p:cNvPr id="4" name="TextBox 3"/>
-          <p:cNvSpPr txBox="1"/>
+              <a:t>Multi-Syndicate Benchmark Dataset: 520 Entities &amp; 1,650 Edges</a:t>
+            </a:r>
+          </a:p>
+        </p:txBody>
+      </p:sp>
+      <p:sp>
+        <p:nvSpPr>
+          <p:cNvPr id="4" name="Rounded Rectangle 3"/>
+          <p:cNvSpPr/>
           <p:nvPr/>
         </p:nvSpPr>
         <p:spPr>
           <a:xfrm>
-            <a:off x="731520" y="1371600"/>
-            <a:ext cx="10698480" cy="5029200"/>
-          </a:xfrm>
-          <a:prstGeom prst="rect">
+            <a:off x="731520" y="1645920"/>
+            <a:ext cx="10728655" cy="4480560"/>
+          </a:xfrm>
+          <a:prstGeom prst="roundRect">
             <a:avLst/>
           </a:prstGeom>
-          <a:noFill/>
-        </p:spPr>
-        <p:txBody>
-          <a:bodyPr wrap="square">
-            <a:spAutoFit/>
-          </a:bodyPr>
-          <a:lstStyle/>
-          <a:p>
+          <a:solidFill>
+            <a:srgbClr val="0E1424"/>
+          </a:solidFill>
+          <a:ln>
+            <a:solidFill>
+              <a:srgbClr val="10B981"/>
+            </a:solidFill>
+          </a:ln>
+        </p:spPr>
+        <p:style>
+          <a:lnRef idx="1">
+            <a:schemeClr val="accent1"/>
+          </a:lnRef>
+          <a:fillRef idx="3">
+            <a:schemeClr val="accent1"/>
+          </a:fillRef>
+          <a:effectRef idx="2">
+            <a:schemeClr val="accent1"/>
+          </a:effectRef>
+          <a:fontRef idx="minor">
+            <a:schemeClr val="lt1"/>
+          </a:fontRef>
+        </p:style>
+        <p:txBody>
+          <a:bodyPr rtlCol="0" anchor="ctr" wrap="square"/>
+          <a:lstStyle/>
+          <a:p>
+            <a:pPr algn="ctr">
+              <a:defRPr sz="1600" b="1">
+                <a:solidFill>
+                  <a:srgbClr val="10B981"/>
+                </a:solidFill>
+              </a:defRPr>
+            </a:pPr>
+            <a:r>
+              <a:t>Graph Partitioning &amp; Topology Breakdown</a:t>
+            </a:r>
+          </a:p>
+          <a:p>
+            <a:br/>
             <a:pPr>
-              <a:spcBef>
-                <a:spcPts val="800"/>
-              </a:spcBef>
-              <a:defRPr sz="1500" b="1">
-                <a:solidFill>
-                  <a:srgbClr val="0F172A"/>
+              <a:defRPr sz="1200">
+                <a:solidFill>
+                  <a:srgbClr val="94A3B8"/>
                 </a:solidFill>
               </a:defRPr>
             </a:pPr>
             <a:r>
-              <a:t>• Feature Engineering &amp; Dimensionality Alignment</a:t>
-            </a:r>
-          </a:p>
-          <a:p>
-            <a:pPr>
-              <a:defRPr sz="1300">
-                <a:solidFill>
-                  <a:srgbClr val="475569"/>
-                </a:solidFill>
-              </a:defRPr>
-            </a:pPr>
-            <a:r>
-              <a:t>Domain-specific feature extraction, temporal windowing, and embedding vectors.</a:t>
-            </a:r>
-          </a:p>
-          <a:p>
-            <a:pPr>
-              <a:spcBef>
-                <a:spcPts val="800"/>
-              </a:spcBef>
-              <a:defRPr sz="1500" b="1">
-                <a:solidFill>
-                  <a:srgbClr val="0F172A"/>
-                </a:solidFill>
-              </a:defRPr>
-            </a:pPr>
-            <a:r>
-              <a:t>• Model Family &amp; Optimization</a:t>
-            </a:r>
-          </a:p>
-          <a:p>
-            <a:pPr>
-              <a:defRPr sz="1300">
-                <a:solidFill>
-                  <a:srgbClr val="475569"/>
-                </a:solidFill>
-              </a:defRPr>
-            </a:pPr>
-            <a:r>
-              <a:t>Ensemble gradient boosting or deep neural networks trained with AdamW and adaptive LR scheduling.</a:t>
-            </a:r>
-          </a:p>
-          <a:p>
-            <a:pPr>
-              <a:spcBef>
-                <a:spcPts val="800"/>
-              </a:spcBef>
-              <a:defRPr sz="1500" b="1">
-                <a:solidFill>
-                  <a:srgbClr val="0F172A"/>
-                </a:solidFill>
-              </a:defRPr>
-            </a:pPr>
-            <a:r>
-              <a:t>• Overfitting Mitigation</a:t>
-            </a:r>
-          </a:p>
-          <a:p>
-            <a:pPr>
-              <a:defRPr sz="1300">
-                <a:solidFill>
-                  <a:srgbClr val="475569"/>
-                </a:solidFill>
-              </a:defRPr>
-            </a:pPr>
-            <a:r>
-              <a:t>Stratified k-fold cross-validation, dropout layers, early stopping, and data augmentation.</a:t>
-            </a:r>
-          </a:p>
-          <a:p>
-            <a:pPr>
-              <a:spcBef>
-                <a:spcPts val="800"/>
-              </a:spcBef>
-              <a:defRPr sz="1500" b="1">
-                <a:solidFill>
-                  <a:srgbClr val="0F172A"/>
-                </a:solidFill>
-              </a:defRPr>
-            </a:pPr>
-            <a:r>
-              <a:t>• Explainability &amp; Auditability</a:t>
-            </a:r>
-          </a:p>
-          <a:p>
-            <a:pPr>
-              <a:defRPr sz="1300">
-                <a:solidFill>
-                  <a:srgbClr val="475569"/>
-                </a:solidFill>
-              </a:defRPr>
-            </a:pPr>
-            <a:r>
-              <a:t>Confidence scores and feature importance attributions for high-stakes decisions.</a:t>
+              <a:t>• Legitimate Commercial Network (450 Nodes, ~1,500 Edges):</a:t>
+            </a:r>
+            <a:br/>
+            <a:r>
+              <a:t>  - Top tier retailers and merchants (Amazon, Walmart, Chevron, Target, Starbucks).</a:t>
+            </a:r>
+            <a:br/>
+            <a:r>
+              <a:t>  - High-volume personal payroll deposits, rent payments, card checkouts, and P2P reimbursements.</a:t>
+            </a:r>
+            <a:br/>
+            <a:br/>
+            <a:r>
+              <a:t>• Transnational Circular Carousel Syndicate (15 Shell &amp; Proxy Nodes, 15 Edges):</a:t>
+            </a:r>
+            <a:br/>
+            <a:r>
+              <a:t>  - 3 closed circular cycles routing $180,000–$340,000 across BVI, Panama, Cyprus, and Seychelles.</a:t>
+            </a:r>
+            <a:br/>
+            <a:r>
+              <a:t>  - High transfer velocity with zero commercial merchant utility.</a:t>
+            </a:r>
+            <a:br/>
+            <a:br/>
+            <a:r>
+              <a:t>• High-Fanout Structured Smurfing Syndicate (32 Mule Nodes, 30 Edges):</a:t>
+            </a:r>
+            <a:br/>
+            <a:r>
+              <a:t>  - 3 central mixing pools distributing $8,900–$9,850 transfers to 30 distributed money mule proxies.</a:t>
+            </a:r>
+            <a:br/>
+            <a:r>
+              <a:t>  - Tuned specifically to evade mandatory Currency Transaction Report (CTR) filing thresholds.</a:t>
+            </a:r>
+            <a:br/>
+            <a:br/>
+            <a:r>
+              <a:t>• Offshore Asset Aggregation Funnel (18 Feeder Nodes, 16 Edges):</a:t>
+            </a:r>
+            <a:br/>
+            <a:r>
+              <a:t>  - 2 offshore haven corporations (Cayman Islands, BVI) collecting high-volume liquidity from domestic feeder accounts.</a:t>
             </a:r>
           </a:p>
         </p:txBody>
@@ -4200,13 +5860,13 @@
         <p:spPr>
           <a:xfrm>
             <a:off x="0" y="0"/>
-            <a:ext cx="12191695" cy="1097280"/>
+            <a:ext cx="12191695" cy="6858000"/>
           </a:xfrm>
           <a:prstGeom prst="rect">
             <a:avLst/>
           </a:prstGeom>
           <a:solidFill>
-            <a:srgbClr val="0F172A"/>
+            <a:srgbClr val="04060D"/>
           </a:solidFill>
           <a:ln>
             <a:noFill/>
@@ -4242,8 +5902,8 @@
         </p:nvSpPr>
         <p:spPr>
           <a:xfrm>
-            <a:off x="731520" y="137160"/>
-            <a:ext cx="10698480" cy="822960"/>
+            <a:off x="731520" y="365760"/>
+            <a:ext cx="10728655" cy="1005840"/>
           </a:xfrm>
           <a:prstGeom prst="rect">
             <a:avLst/>
@@ -4257,109 +5917,139 @@
           <a:lstStyle/>
           <a:p>
             <a:pPr>
-              <a:defRPr sz="2400" b="1">
-                <a:solidFill>
-                  <a:srgbClr val="FFFFFF"/>
+              <a:defRPr sz="1100" b="1">
+                <a:solidFill>
+                  <a:srgbClr val="A855F7"/>
                 </a:solidFill>
               </a:defRPr>
             </a:pPr>
             <a:r>
-              <a:t>5. Experimental Results &amp; Performance Benchmarks</a:t>
+              <a:t>GRAPH MACHINE LEARNING &amp; FINTECH AML • PROJECT-024</a:t>
             </a:r>
           </a:p>
           <a:p>
             <a:pPr>
-              <a:defRPr sz="1100">
-                <a:solidFill>
-                  <a:srgbClr val="94A3B8"/>
+              <a:defRPr sz="2200" b="1">
+                <a:solidFill>
+                  <a:srgbClr val="F8FAFC"/>
                 </a:solidFill>
               </a:defRPr>
             </a:pPr>
             <a:r>
-              <a:t>Academic &amp; Industrial AI Project Series  |  Project 24 of 55</a:t>
-            </a:r>
-          </a:p>
-        </p:txBody>
-      </p:sp>
-      <p:sp>
-        <p:nvSpPr>
-          <p:cNvPr id="4" name="TextBox 3"/>
-          <p:cNvSpPr txBox="1"/>
+              <a:t>Live System Overview: Real-Time Network Telematics Strip</a:t>
+            </a:r>
+          </a:p>
+        </p:txBody>
+      </p:sp>
+      <p:pic>
+        <p:nvPicPr>
+          <p:cNvPr id="4" name="Picture 3" descr="01_dashboard_topology_overview.png"/>
+          <p:cNvPicPr>
+            <a:picLocks noChangeAspect="1"/>
+          </p:cNvPicPr>
           <p:nvPr/>
-        </p:nvSpPr>
-        <p:spPr>
-          <a:xfrm>
-            <a:off x="731520" y="1371600"/>
-            <a:ext cx="10698480" cy="5029200"/>
+        </p:nvPicPr>
+        <p:blipFill>
+          <a:blip r:embed="rId2"/>
+          <a:stretch>
+            <a:fillRect/>
+          </a:stretch>
+        </p:blipFill>
+        <p:spPr>
+          <a:xfrm>
+            <a:off x="731520" y="1645920"/>
+            <a:ext cx="7132320" cy="4480560"/>
           </a:xfrm>
           <a:prstGeom prst="rect">
             <a:avLst/>
           </a:prstGeom>
-          <a:noFill/>
-        </p:spPr>
-        <p:txBody>
-          <a:bodyPr wrap="square">
-            <a:spAutoFit/>
-          </a:bodyPr>
-          <a:lstStyle/>
-          <a:p>
+        </p:spPr>
+      </p:pic>
+      <p:sp>
+        <p:nvSpPr>
+          <p:cNvPr id="5" name="Rounded Rectangle 4"/>
+          <p:cNvSpPr/>
+          <p:nvPr/>
+        </p:nvSpPr>
+        <p:spPr>
+          <a:xfrm>
+            <a:off x="8046720" y="1645920"/>
+            <a:ext cx="3413455" cy="4480560"/>
+          </a:xfrm>
+          <a:prstGeom prst="roundRect">
+            <a:avLst/>
+          </a:prstGeom>
+          <a:solidFill>
+            <a:srgbClr val="0E1424"/>
+          </a:solidFill>
+          <a:ln>
+            <a:solidFill>
+              <a:srgbClr val="A855F7"/>
+            </a:solidFill>
+          </a:ln>
+        </p:spPr>
+        <p:style>
+          <a:lnRef idx="1">
+            <a:schemeClr val="accent1"/>
+          </a:lnRef>
+          <a:fillRef idx="3">
+            <a:schemeClr val="accent1"/>
+          </a:fillRef>
+          <a:effectRef idx="2">
+            <a:schemeClr val="accent1"/>
+          </a:effectRef>
+          <a:fontRef idx="minor">
+            <a:schemeClr val="lt1"/>
+          </a:fontRef>
+        </p:style>
+        <p:txBody>
+          <a:bodyPr rtlCol="0" anchor="ctr" wrap="square"/>
+          <a:lstStyle/>
+          <a:p>
+            <a:pPr algn="ctr">
+              <a:defRPr sz="1500" b="1">
+                <a:solidFill>
+                  <a:srgbClr val="38BDF8"/>
+                </a:solidFill>
+              </a:defRPr>
+            </a:pPr>
+            <a:r>
+              <a:t>Forensic Capability Analysis</a:t>
+            </a:r>
+          </a:p>
+          <a:p>
+            <a:br/>
             <a:pPr>
-              <a:spcBef>
-                <a:spcPts val="1200"/>
-              </a:spcBef>
-              <a:defRPr sz="1500" b="1">
-                <a:solidFill>
-                  <a:srgbClr val="10B981"/>
+              <a:defRPr sz="1100">
+                <a:solidFill>
+                  <a:srgbClr val="94A3B8"/>
                 </a:solidFill>
               </a:defRPr>
             </a:pPr>
             <a:r>
-              <a:t>★ Validation Accuracy / Score: Achieved 94.8% on independent validation test holdout partitions.</a:t>
-            </a:r>
-          </a:p>
-          <a:p>
-            <a:pPr>
-              <a:spcBef>
-                <a:spcPts val="1200"/>
-              </a:spcBef>
-              <a:defRPr sz="1500" b="1">
-                <a:solidFill>
-                  <a:srgbClr val="10B981"/>
-                </a:solidFill>
-              </a:defRPr>
-            </a:pPr>
-            <a:r>
-              <a:t>★ F1-Score / Macro Precision: Balanced metric of 0.932 across positive and negative classification targets.</a:t>
-            </a:r>
-          </a:p>
-          <a:p>
-            <a:pPr>
-              <a:spcBef>
-                <a:spcPts val="1200"/>
-              </a:spcBef>
-              <a:defRPr sz="1500" b="1">
-                <a:solidFill>
-                  <a:srgbClr val="10B981"/>
-                </a:solidFill>
-              </a:defRPr>
-            </a:pPr>
-            <a:r>
-              <a:t>★ Inference Latency Profile: Median latency of 18.4 ms per inference query on edge CPU hardware.</a:t>
-            </a:r>
-          </a:p>
-          <a:p>
-            <a:pPr>
-              <a:spcBef>
-                <a:spcPts val="1200"/>
-              </a:spcBef>
-              <a:defRPr sz="1500" b="1">
-                <a:solidFill>
-                  <a:srgbClr val="10B981"/>
-                </a:solidFill>
-              </a:defRPr>
-            </a:pPr>
-            <a:r>
-              <a:t>★ False Positive Rate (FPR): Maintained below 2.8%, satisfying stringent operational false alarm constraints.</a:t>
+              <a:t>• Global Telematics Banner:</a:t>
+            </a:r>
+            <a:br/>
+            <a:r>
+              <a:t>Displays real-time tracking of 525+ nodes, 1,650+ transactions, active freeze sanctions, and graph density.</a:t>
+            </a:r>
+            <a:br/>
+            <a:br/>
+            <a:r>
+              <a:t>• Proactive System Health:</a:t>
+            </a:r>
+            <a:br/>
+            <a:r>
+              <a:t>Reports live GNN engine heartbeat, SQLite database connection status, and detected syndicate count.</a:t>
+            </a:r>
+            <a:br/>
+            <a:br/>
+            <a:r>
+              <a:t>• Tabbed Workflow Navigation:</a:t>
+            </a:r>
+            <a:br/>
+            <a:r>
+              <a:t>Seamless transitions between Topology Canvas, Syndicate Hunter, GNN Embeddings, and FinCEN SARs.</a:t>
             </a:r>
           </a:p>
         </p:txBody>
@@ -4391,13 +6081,13 @@
         <p:spPr>
           <a:xfrm>
             <a:off x="0" y="0"/>
-            <a:ext cx="12191695" cy="1097280"/>
+            <a:ext cx="12191695" cy="6858000"/>
           </a:xfrm>
           <a:prstGeom prst="rect">
             <a:avLst/>
           </a:prstGeom>
           <a:solidFill>
-            <a:srgbClr val="0F172A"/>
+            <a:srgbClr val="04060D"/>
           </a:solidFill>
           <a:ln>
             <a:noFill/>
@@ -4433,8 +6123,8 @@
         </p:nvSpPr>
         <p:spPr>
           <a:xfrm>
-            <a:off x="731520" y="137160"/>
-            <a:ext cx="10698480" cy="822960"/>
+            <a:off x="731520" y="365760"/>
+            <a:ext cx="10728655" cy="1005840"/>
           </a:xfrm>
           <a:prstGeom prst="rect">
             <a:avLst/>
@@ -4448,157 +6138,139 @@
           <a:lstStyle/>
           <a:p>
             <a:pPr>
-              <a:defRPr sz="2400" b="1">
-                <a:solidFill>
-                  <a:srgbClr val="FFFFFF"/>
+              <a:defRPr sz="1100" b="1">
+                <a:solidFill>
+                  <a:srgbClr val="A855F7"/>
                 </a:solidFill>
               </a:defRPr>
             </a:pPr>
             <a:r>
-              <a:t>6. Technology Stack &amp; Production Deployment</a:t>
+              <a:t>GRAPH MACHINE LEARNING &amp; FINTECH AML • PROJECT-024</a:t>
             </a:r>
           </a:p>
           <a:p>
             <a:pPr>
-              <a:defRPr sz="1100">
-                <a:solidFill>
-                  <a:srgbClr val="94A3B8"/>
+              <a:defRPr sz="2200" b="1">
+                <a:solidFill>
+                  <a:srgbClr val="F8FAFC"/>
                 </a:solidFill>
               </a:defRPr>
             </a:pPr>
             <a:r>
-              <a:t>Academic &amp; Industrial AI Project Series  |  Project 24 of 55</a:t>
-            </a:r>
-          </a:p>
-        </p:txBody>
-      </p:sp>
-      <p:sp>
-        <p:nvSpPr>
-          <p:cNvPr id="4" name="TextBox 3"/>
-          <p:cNvSpPr txBox="1"/>
+              <a:t>Interactive Graph Physics Canvas: Visualizing Multi-Hop Topologies</a:t>
+            </a:r>
+          </a:p>
+        </p:txBody>
+      </p:sp>
+      <p:pic>
+        <p:nvPicPr>
+          <p:cNvPr id="4" name="Picture 3" descr="02_force_directed_graph_canvas.png"/>
+          <p:cNvPicPr>
+            <a:picLocks noChangeAspect="1"/>
+          </p:cNvPicPr>
           <p:nvPr/>
-        </p:nvSpPr>
-        <p:spPr>
-          <a:xfrm>
-            <a:off x="731520" y="1371600"/>
-            <a:ext cx="10698480" cy="5029200"/>
+        </p:nvPicPr>
+        <p:blipFill>
+          <a:blip r:embed="rId2"/>
+          <a:stretch>
+            <a:fillRect/>
+          </a:stretch>
+        </p:blipFill>
+        <p:spPr>
+          <a:xfrm>
+            <a:off x="731520" y="1645920"/>
+            <a:ext cx="7132320" cy="4480560"/>
           </a:xfrm>
           <a:prstGeom prst="rect">
             <a:avLst/>
           </a:prstGeom>
-          <a:noFill/>
-        </p:spPr>
-        <p:txBody>
-          <a:bodyPr wrap="square">
-            <a:spAutoFit/>
-          </a:bodyPr>
-          <a:lstStyle/>
-          <a:p>
+        </p:spPr>
+      </p:pic>
+      <p:sp>
+        <p:nvSpPr>
+          <p:cNvPr id="5" name="Rounded Rectangle 4"/>
+          <p:cNvSpPr/>
+          <p:nvPr/>
+        </p:nvSpPr>
+        <p:spPr>
+          <a:xfrm>
+            <a:off x="8046720" y="1645920"/>
+            <a:ext cx="3413455" cy="4480560"/>
+          </a:xfrm>
+          <a:prstGeom prst="roundRect">
+            <a:avLst/>
+          </a:prstGeom>
+          <a:solidFill>
+            <a:srgbClr val="0E1424"/>
+          </a:solidFill>
+          <a:ln>
+            <a:solidFill>
+              <a:srgbClr val="A855F7"/>
+            </a:solidFill>
+          </a:ln>
+        </p:spPr>
+        <p:style>
+          <a:lnRef idx="1">
+            <a:schemeClr val="accent1"/>
+          </a:lnRef>
+          <a:fillRef idx="3">
+            <a:schemeClr val="accent1"/>
+          </a:fillRef>
+          <a:effectRef idx="2">
+            <a:schemeClr val="accent1"/>
+          </a:effectRef>
+          <a:fontRef idx="minor">
+            <a:schemeClr val="lt1"/>
+          </a:fontRef>
+        </p:style>
+        <p:txBody>
+          <a:bodyPr rtlCol="0" anchor="ctr" wrap="square"/>
+          <a:lstStyle/>
+          <a:p>
+            <a:pPr algn="ctr">
+              <a:defRPr sz="1500" b="1">
+                <a:solidFill>
+                  <a:srgbClr val="38BDF8"/>
+                </a:solidFill>
+              </a:defRPr>
+            </a:pPr>
+            <a:r>
+              <a:t>Forensic Capability Analysis</a:t>
+            </a:r>
+          </a:p>
+          <a:p>
+            <a:br/>
             <a:pPr>
-              <a:spcBef>
-                <a:spcPts val="800"/>
-              </a:spcBef>
-              <a:defRPr sz="1500" b="1">
-                <a:solidFill>
-                  <a:srgbClr val="1E3A8A"/>
+              <a:defRPr sz="1100">
+                <a:solidFill>
+                  <a:srgbClr val="94A3B8"/>
                 </a:solidFill>
               </a:defRPr>
             </a:pPr>
             <a:r>
-              <a:t>⚙ Core Machine Learning Framework</a:t>
-            </a:r>
-          </a:p>
-          <a:p>
-            <a:pPr>
-              <a:defRPr sz="1300">
-                <a:solidFill>
-                  <a:srgbClr val="475569"/>
-                </a:solidFill>
-              </a:defRPr>
-            </a:pPr>
-            <a:r>
-              <a:t>PyTorch 2.0+ / Scikit-learn / HuggingFace Transformers / OpenCV</a:t>
-            </a:r>
-          </a:p>
-          <a:p>
-            <a:pPr>
-              <a:spcBef>
-                <a:spcPts val="800"/>
-              </a:spcBef>
-              <a:defRPr sz="1500" b="1">
-                <a:solidFill>
-                  <a:srgbClr val="1E3A8A"/>
-                </a:solidFill>
-              </a:defRPr>
-            </a:pPr>
-            <a:r>
-              <a:t>⚙ Asynchronous REST Backend</a:t>
-            </a:r>
-          </a:p>
-          <a:p>
-            <a:pPr>
-              <a:defRPr sz="1300">
-                <a:solidFill>
-                  <a:srgbClr val="475569"/>
-                </a:solidFill>
-              </a:defRPr>
-            </a:pPr>
-            <a:r>
-              <a:t>FastAPI / Uvicorn ASGI Server / Pydantic V2 Type Safety</a:t>
-            </a:r>
-          </a:p>
-          <a:p>
-            <a:pPr>
-              <a:spcBef>
-                <a:spcPts val="800"/>
-              </a:spcBef>
-              <a:defRPr sz="1500" b="1">
-                <a:solidFill>
-                  <a:srgbClr val="1E3A8A"/>
-                </a:solidFill>
-              </a:defRPr>
-            </a:pPr>
-            <a:r>
-              <a:t>⚙ Data Persistence &amp; Storage</a:t>
-            </a:r>
-          </a:p>
-          <a:p>
-            <a:pPr>
-              <a:defRPr sz="1300">
-                <a:solidFill>
-                  <a:srgbClr val="475569"/>
-                </a:solidFill>
-              </a:defRPr>
-            </a:pPr>
-            <a:r>
-              <a:t>SQLite / PostgreSQL with transactional integrity &amp; audit trail</a:t>
-            </a:r>
-          </a:p>
-          <a:p>
-            <a:pPr>
-              <a:spcBef>
-                <a:spcPts val="800"/>
-              </a:spcBef>
-              <a:defRPr sz="1500" b="1">
-                <a:solidFill>
-                  <a:srgbClr val="1E3A8A"/>
-                </a:solidFill>
-              </a:defRPr>
-            </a:pPr>
-            <a:r>
-              <a:t>⚙ Interactive Frontend Layer</a:t>
-            </a:r>
-          </a:p>
-          <a:p>
-            <a:pPr>
-              <a:defRPr sz="1300">
-                <a:solidFill>
-                  <a:srgbClr val="475569"/>
-                </a:solidFill>
-              </a:defRPr>
-            </a:pPr>
-            <a:r>
-              <a:t>Modern Responsive Web Portal (HTML5, Tailwind/CSS, JavaScript ES6+)</a:t>
+              <a:t>• Force-Directed Canvas Physics:</a:t>
+            </a:r>
+            <a:br/>
+            <a:r>
+              <a:t>Renders dynamic edge flows with velocity-modulated particles representing capital volume.</a:t>
+            </a:r>
+            <a:br/>
+            <a:br/>
+            <a:r>
+              <a:t>• Cluster Differentiation:</a:t>
+            </a:r>
+            <a:br/>
+            <a:r>
+              <a:t>Normal retail clusters cluster tightly around merchant hubs, while syndicates stand out with distinct geometric topology.</a:t>
+            </a:r>
+            <a:br/>
+            <a:br/>
+            <a:r>
+              <a:t>• Interactive Manipulation:</a:t>
+            </a:r>
+            <a:br/>
+            <a:r>
+              <a:t>Supports real-time zoom, pan, node dragging, and camera focus directly in standard HTML5 Canvas.</a:t>
             </a:r>
           </a:p>
         </p:txBody>
@@ -4630,13 +6302,13 @@
         <p:spPr>
           <a:xfrm>
             <a:off x="0" y="0"/>
-            <a:ext cx="12191695" cy="1097280"/>
+            <a:ext cx="12191695" cy="6858000"/>
           </a:xfrm>
           <a:prstGeom prst="rect">
             <a:avLst/>
           </a:prstGeom>
           <a:solidFill>
-            <a:srgbClr val="0F172A"/>
+            <a:srgbClr val="04060D"/>
           </a:solidFill>
           <a:ln>
             <a:noFill/>
@@ -4672,8 +6344,8 @@
         </p:nvSpPr>
         <p:spPr>
           <a:xfrm>
-            <a:off x="731520" y="137160"/>
-            <a:ext cx="10698480" cy="822960"/>
+            <a:off x="731520" y="365760"/>
+            <a:ext cx="10728655" cy="1005840"/>
           </a:xfrm>
           <a:prstGeom prst="rect">
             <a:avLst/>
@@ -4687,17 +6359,108 @@
           <a:lstStyle/>
           <a:p>
             <a:pPr>
-              <a:defRPr sz="2400" b="1">
-                <a:solidFill>
-                  <a:srgbClr val="FFFFFF"/>
+              <a:defRPr sz="1100" b="1">
+                <a:solidFill>
+                  <a:srgbClr val="A855F7"/>
                 </a:solidFill>
               </a:defRPr>
             </a:pPr>
             <a:r>
-              <a:t>7. Conclusion &amp; Future Roadmap</a:t>
-            </a:r>
-          </a:p>
-          <a:p>
+              <a:t>GRAPH MACHINE LEARNING &amp; FINTECH AML • PROJECT-024</a:t>
+            </a:r>
+          </a:p>
+          <a:p>
+            <a:pPr>
+              <a:defRPr sz="2200" b="1">
+                <a:solidFill>
+                  <a:srgbClr val="F8FAFC"/>
+                </a:solidFill>
+              </a:defRPr>
+            </a:pPr>
+            <a:r>
+              <a:t>Deep Forensic Node Inspector: 2-Hop Ego Network Attribution</a:t>
+            </a:r>
+          </a:p>
+        </p:txBody>
+      </p:sp>
+      <p:pic>
+        <p:nvPicPr>
+          <p:cNvPr id="4" name="Picture 3" descr="03_node_forensic_drawer_inspector.png"/>
+          <p:cNvPicPr>
+            <a:picLocks noChangeAspect="1"/>
+          </p:cNvPicPr>
+          <p:nvPr/>
+        </p:nvPicPr>
+        <p:blipFill>
+          <a:blip r:embed="rId2"/>
+          <a:stretch>
+            <a:fillRect/>
+          </a:stretch>
+        </p:blipFill>
+        <p:spPr>
+          <a:xfrm>
+            <a:off x="731520" y="1645920"/>
+            <a:ext cx="7132320" cy="4480560"/>
+          </a:xfrm>
+          <a:prstGeom prst="rect">
+            <a:avLst/>
+          </a:prstGeom>
+        </p:spPr>
+      </p:pic>
+      <p:sp>
+        <p:nvSpPr>
+          <p:cNvPr id="5" name="Rounded Rectangle 4"/>
+          <p:cNvSpPr/>
+          <p:nvPr/>
+        </p:nvSpPr>
+        <p:spPr>
+          <a:xfrm>
+            <a:off x="8046720" y="1645920"/>
+            <a:ext cx="3413455" cy="4480560"/>
+          </a:xfrm>
+          <a:prstGeom prst="roundRect">
+            <a:avLst/>
+          </a:prstGeom>
+          <a:solidFill>
+            <a:srgbClr val="0E1424"/>
+          </a:solidFill>
+          <a:ln>
+            <a:solidFill>
+              <a:srgbClr val="A855F7"/>
+            </a:solidFill>
+          </a:ln>
+        </p:spPr>
+        <p:style>
+          <a:lnRef idx="1">
+            <a:schemeClr val="accent1"/>
+          </a:lnRef>
+          <a:fillRef idx="3">
+            <a:schemeClr val="accent1"/>
+          </a:fillRef>
+          <a:effectRef idx="2">
+            <a:schemeClr val="accent1"/>
+          </a:effectRef>
+          <a:fontRef idx="minor">
+            <a:schemeClr val="lt1"/>
+          </a:fontRef>
+        </p:style>
+        <p:txBody>
+          <a:bodyPr rtlCol="0" anchor="ctr" wrap="square"/>
+          <a:lstStyle/>
+          <a:p>
+            <a:pPr algn="ctr">
+              <a:defRPr sz="1500" b="1">
+                <a:solidFill>
+                  <a:srgbClr val="38BDF8"/>
+                </a:solidFill>
+              </a:defRPr>
+            </a:pPr>
+            <a:r>
+              <a:t>Forensic Capability Analysis</a:t>
+            </a:r>
+          </a:p>
+          <a:p>
+            <a:br/>
             <a:pPr>
               <a:defRPr sz="1100">
                 <a:solidFill>
@@ -4706,21 +6469,104 @@
               </a:defRPr>
             </a:pPr>
             <a:r>
-              <a:t>Academic &amp; Industrial AI Project Series  |  Project 24 of 55</a:t>
-            </a:r>
-          </a:p>
-        </p:txBody>
-      </p:sp>
-      <p:sp>
-        <p:nvSpPr>
-          <p:cNvPr id="4" name="TextBox 3"/>
+              <a:t>• Instant Forensic Dossier:</a:t>
+            </a:r>
+            <a:br/>
+            <a:r>
+              <a:t>Displays entity account ID, jurisdiction, balance, degree centrality, and total historical inflow/outflow.</a:t>
+            </a:r>
+            <a:br/>
+            <a:br/>
+            <a:r>
+              <a:t>• GNN Explanation Verdict:</a:t>
+            </a:r>
+            <a:br/>
+            <a:r>
+              <a:t>Outputs explainable model decisions such as 'Circular Carousel Layering Node' or 'Smurfing Dispersal'.</a:t>
+            </a:r>
+            <a:br/>
+            <a:br/>
+            <a:r>
+              <a:t>• Autonomous Actions:</a:t>
+            </a:r>
+            <a:br/>
+            <a:r>
+              <a:t>Enables compliance officers to freeze or unfreeze accounts with instant topological risk updates.</a:t>
+            </a:r>
+          </a:p>
+        </p:txBody>
+      </p:sp>
+    </p:spTree>
+  </p:cSld>
+  <p:clrMapOvr>
+    <a:masterClrMapping/>
+  </p:clrMapOvr>
+</p:sld>
+</file>
+
+<file path=ppt/slides/slide9.xml><?xml version="1.0" encoding="utf-8"?>
+<p:sld xmlns:a="http://schemas.openxmlformats.org/drawingml/2006/main" xmlns:p="http://schemas.openxmlformats.org/presentationml/2006/main" xmlns:r="http://schemas.openxmlformats.org/officeDocument/2006/relationships">
+  <p:cSld>
+    <p:spTree>
+      <p:nvGrpSpPr>
+        <p:cNvPr id="1" name=""/>
+        <p:cNvGrpSpPr/>
+        <p:nvPr/>
+      </p:nvGrpSpPr>
+      <p:grpSpPr/>
+      <p:sp>
+        <p:nvSpPr>
+          <p:cNvPr id="2" name="Rectangle 1"/>
+          <p:cNvSpPr/>
+          <p:nvPr/>
+        </p:nvSpPr>
+        <p:spPr>
+          <a:xfrm>
+            <a:off x="0" y="0"/>
+            <a:ext cx="12191695" cy="6858000"/>
+          </a:xfrm>
+          <a:prstGeom prst="rect">
+            <a:avLst/>
+          </a:prstGeom>
+          <a:solidFill>
+            <a:srgbClr val="04060D"/>
+          </a:solidFill>
+          <a:ln>
+            <a:noFill/>
+          </a:ln>
+        </p:spPr>
+        <p:style>
+          <a:lnRef idx="1">
+            <a:schemeClr val="accent1"/>
+          </a:lnRef>
+          <a:fillRef idx="3">
+            <a:schemeClr val="accent1"/>
+          </a:fillRef>
+          <a:effectRef idx="2">
+            <a:schemeClr val="accent1"/>
+          </a:effectRef>
+          <a:fontRef idx="minor">
+            <a:schemeClr val="lt1"/>
+          </a:fontRef>
+        </p:style>
+        <p:txBody>
+          <a:bodyPr rtlCol="0" anchor="ctr"/>
+          <a:lstStyle/>
+          <a:p>
+            <a:pPr algn="ctr"/>
+          </a:p>
+        </p:txBody>
+      </p:sp>
+      <p:sp>
+        <p:nvSpPr>
+          <p:cNvPr id="3" name="TextBox 2"/>
           <p:cNvSpPr txBox="1"/>
           <p:nvPr/>
         </p:nvSpPr>
         <p:spPr>
           <a:xfrm>
-            <a:off x="731520" y="1371600"/>
-            <a:ext cx="10698480" cy="5029200"/>
+            <a:off x="731520" y="365760"/>
+            <a:ext cx="10728655" cy="1005840"/>
           </a:xfrm>
           <a:prstGeom prst="rect">
             <a:avLst/>
@@ -4734,83 +6580,139 @@
           <a:lstStyle/>
           <a:p>
             <a:pPr>
-              <a:spcBef>
-                <a:spcPts val="1000"/>
-              </a:spcBef>
+              <a:defRPr sz="1100" b="1">
+                <a:solidFill>
+                  <a:srgbClr val="A855F7"/>
+                </a:solidFill>
+              </a:defRPr>
+            </a:pPr>
+            <a:r>
+              <a:t>GRAPH MACHINE LEARNING &amp; FINTECH AML • PROJECT-024</a:t>
+            </a:r>
+          </a:p>
+          <a:p>
+            <a:pPr>
+              <a:defRPr sz="2200" b="1">
+                <a:solidFill>
+                  <a:srgbClr val="F8FAFC"/>
+                </a:solidFill>
+              </a:defRPr>
+            </a:pPr>
+            <a:r>
+              <a:t>Automated Syndicate Pattern Hunter: Ring Extraction &amp; Traversal</a:t>
+            </a:r>
+          </a:p>
+        </p:txBody>
+      </p:sp>
+      <p:pic>
+        <p:nvPicPr>
+          <p:cNvPr id="4" name="Picture 3" descr="04_syndicate_pattern_hunter.png"/>
+          <p:cNvPicPr>
+            <a:picLocks noChangeAspect="1"/>
+          </p:cNvPicPr>
+          <p:nvPr/>
+        </p:nvPicPr>
+        <p:blipFill>
+          <a:blip r:embed="rId2"/>
+          <a:stretch>
+            <a:fillRect/>
+          </a:stretch>
+        </p:blipFill>
+        <p:spPr>
+          <a:xfrm>
+            <a:off x="731520" y="1645920"/>
+            <a:ext cx="7132320" cy="4480560"/>
+          </a:xfrm>
+          <a:prstGeom prst="rect">
+            <a:avLst/>
+          </a:prstGeom>
+        </p:spPr>
+      </p:pic>
+      <p:sp>
+        <p:nvSpPr>
+          <p:cNvPr id="5" name="Rounded Rectangle 4"/>
+          <p:cNvSpPr/>
+          <p:nvPr/>
+        </p:nvSpPr>
+        <p:spPr>
+          <a:xfrm>
+            <a:off x="8046720" y="1645920"/>
+            <a:ext cx="3413455" cy="4480560"/>
+          </a:xfrm>
+          <a:prstGeom prst="roundRect">
+            <a:avLst/>
+          </a:prstGeom>
+          <a:solidFill>
+            <a:srgbClr val="0E1424"/>
+          </a:solidFill>
+          <a:ln>
+            <a:solidFill>
+              <a:srgbClr val="A855F7"/>
+            </a:solidFill>
+          </a:ln>
+        </p:spPr>
+        <p:style>
+          <a:lnRef idx="1">
+            <a:schemeClr val="accent1"/>
+          </a:lnRef>
+          <a:fillRef idx="3">
+            <a:schemeClr val="accent1"/>
+          </a:fillRef>
+          <a:effectRef idx="2">
+            <a:schemeClr val="accent1"/>
+          </a:effectRef>
+          <a:fontRef idx="minor">
+            <a:schemeClr val="lt1"/>
+          </a:fontRef>
+        </p:style>
+        <p:txBody>
+          <a:bodyPr rtlCol="0" anchor="ctr" wrap="square"/>
+          <a:lstStyle/>
+          <a:p>
+            <a:pPr algn="ctr">
               <a:defRPr sz="1500" b="1">
                 <a:solidFill>
-                  <a:srgbClr val="0F172A"/>
+                  <a:srgbClr val="38BDF8"/>
                 </a:solidFill>
               </a:defRPr>
             </a:pPr>
             <a:r>
-              <a:t>■ Project Accomplishments</a:t>
-            </a:r>
-          </a:p>
-          <a:p>
+              <a:t>Forensic Capability Analysis</a:t>
+            </a:r>
+          </a:p>
+          <a:p>
+            <a:br/>
             <a:pPr>
-              <a:defRPr sz="1300">
-                <a:solidFill>
-                  <a:srgbClr val="475569"/>
+              <a:defRPr sz="1100">
+                <a:solidFill>
+                  <a:srgbClr val="94A3B8"/>
                 </a:solidFill>
               </a:defRPr>
             </a:pPr>
             <a:r>
-              <a:t>Engineered a robust, end-to-end prototype validating the initial abstract with reproducible experiments.</a:t>
-            </a:r>
-          </a:p>
-          <a:p>
-            <a:pPr>
-              <a:spcBef>
-                <a:spcPts val="1000"/>
-              </a:spcBef>
-              <a:defRPr sz="1500" b="1">
-                <a:solidFill>
-                  <a:srgbClr val="0F172A"/>
-                </a:solidFill>
-              </a:defRPr>
-            </a:pPr>
-            <a:r>
-              <a:t>■ Industrial Significance</a:t>
-            </a:r>
-          </a:p>
-          <a:p>
-            <a:pPr>
-              <a:defRPr sz="1300">
-                <a:solidFill>
-                  <a:srgbClr val="475569"/>
-                </a:solidFill>
-              </a:defRPr>
-            </a:pPr>
-            <a:r>
-              <a:t>Eliminates latency and manual friction while ensuring high confidence automated decision support.</a:t>
-            </a:r>
-          </a:p>
-          <a:p>
-            <a:pPr>
-              <a:spcBef>
-                <a:spcPts val="1000"/>
-              </a:spcBef>
-              <a:defRPr sz="1500" b="1">
-                <a:solidFill>
-                  <a:srgbClr val="0F172A"/>
-                </a:solidFill>
-              </a:defRPr>
-            </a:pPr>
-            <a:r>
-              <a:t>■ Future Scope &amp; Extensions</a:t>
-            </a:r>
-          </a:p>
-          <a:p>
-            <a:pPr>
-              <a:defRPr sz="1300">
-                <a:solidFill>
-                  <a:srgbClr val="475569"/>
-                </a:solidFill>
-              </a:defRPr>
-            </a:pPr>
-            <a:r>
-              <a:t>Integration with federated edge sensors, distributed multi-tenant cloud clustering, and automated active learning.</a:t>
+              <a:t>• Cycle Detection Algorithms:</a:t>
+            </a:r>
+            <a:br/>
+            <a:r>
+              <a:t>Automatically identifies closed loops (A -&gt; B -&gt; C -&gt; D -&gt; A) and isolates ring members across offshore havens.</a:t>
+            </a:r>
+            <a:br/>
+            <a:br/>
+            <a:r>
+              <a:t>• Threat Scoring Engine:</a:t>
+            </a:r>
+            <a:br/>
+            <a:r>
+              <a:t>Evaluates syndicate risk score and total involved transaction volume in USD.</a:t>
+            </a:r>
+            <a:br/>
+            <a:br/>
+            <a:r>
+              <a:t>• Topology Camera Focus:</a:t>
+            </a:r>
+            <a:br/>
+            <a:r>
+              <a:t>One-click 'Focus On Ring' button immediately repositions canvas zoom directly onto the involved cartel nodes.</a:t>
             </a:r>
           </a:p>
         </p:txBody>
